--- a/Roblox-Dev-Rig-Setup.pptx
+++ b/Roblox-Dev-Rig-Setup.pptx
@@ -14,9 +14,10 @@
     <p:sldId id="262" r:id="rId8"/>
     <p:sldId id="263" r:id="rId9"/>
     <p:sldId id="264" r:id="rId10"/>
+    <p:sldId id="265" r:id="rId11"/>
   </p:sldIdLst>
   <p:notesMasterIdLst>
-    <p:notesMasterId r:id="rId11"/>
+    <p:notesMasterId r:id="rId12"/>
   </p:notesMasterIdLst>
   <p:sldSz cx="12192000" cy="6858000"/>
   <p:notesSz cx="6858000" cy="12192000"/>
@@ -552,6 +553,94 @@
 </p:notes>
 </file>
 
+<file path=ppt/notesSlides/notesSlide10.xml><?xml version="1.0" encoding="utf-8"?>
+<p:notes xmlns:a="http://schemas.openxmlformats.org/drawingml/2006/main" xmlns:r="http://schemas.openxmlformats.org/officeDocument/2006/relationships" xmlns:p="http://schemas.openxmlformats.org/presentationml/2006/main">
+  <p:cSld>
+    <p:spTree>
+      <p:nvGrpSpPr>
+        <p:cNvPr id="1" name=""/>
+        <p:cNvGrpSpPr/>
+        <p:nvPr/>
+      </p:nvGrpSpPr>
+      <p:grpSpPr>
+        <a:xfrm>
+          <a:off x="0" y="0"/>
+          <a:ext cx="0" cy="0"/>
+          <a:chOff x="0" y="0"/>
+          <a:chExt cx="0" cy="0"/>
+        </a:xfrm>
+      </p:grpSpPr>
+      <p:sp>
+        <p:nvSpPr>
+          <p:cNvPr id="2" name="Slide Image Placeholder 1"/>
+          <p:cNvSpPr>
+            <a:spLocks noGrp="1" noRot="1" noChangeAspect="1"/>
+          </p:cNvSpPr>
+          <p:nvPr>
+            <p:ph type="sldImg"/>
+          </p:nvPr>
+        </p:nvSpPr>
+        <p:spPr/>
+      </p:sp>
+      <p:sp>
+        <p:nvSpPr>
+          <p:cNvPr id="3" name="Notes Placeholder 2"/>
+          <p:cNvSpPr>
+            <a:spLocks noGrp="1"/>
+          </p:cNvSpPr>
+          <p:nvPr>
+            <p:ph type="body" idx="1"/>
+          </p:nvPr>
+        </p:nvSpPr>
+        <p:spPr/>
+        <p:txBody>
+          <a:bodyPr/>
+          <a:lstStyle/>
+          <a:p>
+            <a:r>
+              <a:rPr lang="en-US" dirty="0"/>
+              <a:t/>
+            </a:r>
+            <a:endParaRPr lang="en-US" dirty="0"/>
+          </a:p>
+        </p:txBody>
+      </p:sp>
+      <p:sp>
+        <p:nvSpPr>
+          <p:cNvPr id="4" name="Slide Number Placeholder 3"/>
+          <p:cNvSpPr>
+            <a:spLocks noGrp="1"/>
+          </p:cNvSpPr>
+          <p:nvPr>
+            <p:ph type="sldNum" sz="quarter" idx="10"/>
+          </p:nvPr>
+        </p:nvSpPr>
+        <p:spPr/>
+        <p:txBody>
+          <a:bodyPr/>
+          <a:lstStyle/>
+          <a:p>
+            <a:fld id="{F7021451-1387-4CA6-816F-3879F97B5CBC}" type="slidenum">
+              <a:rPr lang="en-US"/>
+              <a:t>10</a:t>
+            </a:fld>
+            <a:endParaRPr lang="en-US"/>
+          </a:p>
+        </p:txBody>
+      </p:sp>
+    </p:spTree>
+    <p:extLst>
+      <p:ext uri="{BB962C8B-B14F-4D97-AF65-F5344CB8AC3E}">
+        <p14:creationId xmlns:p14="http://schemas.microsoft.com/office/powerpoint/2010/main" val="1024086991"/>
+      </p:ext>
+    </p:extLst>
+  </p:cSld>
+  <p:clrMapOvr>
+    <a:masterClrMapping/>
+  </p:clrMapOvr>
+</p:notes>
+</file>
+
 <file path=ppt/notesSlides/notesSlide2.xml><?xml version="1.0" encoding="utf-8"?>
 <p:notes xmlns:a="http://schemas.openxmlformats.org/drawingml/2006/main" xmlns:r="http://schemas.openxmlformats.org/officeDocument/2006/relationships" xmlns:p="http://schemas.openxmlformats.org/presentationml/2006/main">
   <p:cSld>
@@ -1685,7 +1774,7 @@
               <a:buNone/>
             </a:pPr>
             <a:r>
-              <a:rPr lang="en-US" sz="5800" b="1" dirty="0">
+              <a:rPr lang="en-US" sz="5600" b="1" dirty="0">
                 <a:solidFill>
                   <a:srgbClr val="00E5FF"/>
                 </a:solidFill>
@@ -1695,7 +1784,7 @@
               </a:rPr>
               <a:t>ROBLOX DEV RIG</a:t>
             </a:r>
-            <a:endParaRPr lang="en-US" sz="5800" dirty="0"/>
+            <a:endParaRPr lang="en-US" sz="5600" dirty="0"/>
           </a:p>
         </p:txBody>
       </p:sp>
@@ -1707,7 +1796,7 @@
         </p:nvSpPr>
         <p:spPr>
           <a:xfrm>
-            <a:off x="658368" y="2926080"/>
+            <a:off x="658368" y="2880360"/>
             <a:ext cx="10972800" cy="914400"/>
           </a:xfrm>
           <a:prstGeom prst="rect">
@@ -1724,7 +1813,7 @@
               <a:buNone/>
             </a:pPr>
             <a:r>
-              <a:rPr lang="en-US" sz="3800" b="1" dirty="0">
+              <a:rPr lang="en-US" sz="3600" b="1" dirty="0">
                 <a:solidFill>
                   <a:srgbClr val="FF3DB0"/>
                 </a:solidFill>
@@ -1734,7 +1823,7 @@
               </a:rPr>
               <a:t>Build games like a pro</a:t>
             </a:r>
-            <a:endParaRPr lang="en-US" sz="3800" dirty="0"/>
+            <a:endParaRPr lang="en-US" sz="3600" dirty="0"/>
           </a:p>
         </p:txBody>
       </p:sp>
@@ -1746,24 +1835,24 @@
         </p:nvSpPr>
         <p:spPr>
           <a:xfrm>
-            <a:off x="658368" y="4069080"/>
-            <a:ext cx="10789920" cy="548640"/>
-          </a:xfrm>
-          <a:prstGeom prst="rect">
-            <a:avLst/>
-          </a:prstGeom>
-          <a:noFill/>
-          <a:ln/>
-        </p:spPr>
-        <p:txBody>
-          <a:bodyPr wrap="square" lIns="0" tIns="0" rIns="0" bIns="0" rtlCol="0" anchor="ctr"/>
-          <a:lstStyle/>
-          <a:p>
-            <a:pPr indent="0" marL="0">
-              <a:buNone/>
-            </a:pPr>
-            <a:r>
-              <a:rPr lang="en-US" sz="1600" dirty="0">
+            <a:off x="658368" y="4023360"/>
+            <a:ext cx="10881360" cy="548640"/>
+          </a:xfrm>
+          <a:prstGeom prst="rect">
+            <a:avLst/>
+          </a:prstGeom>
+          <a:noFill/>
+          <a:ln/>
+        </p:spPr>
+        <p:txBody>
+          <a:bodyPr wrap="square" lIns="0" tIns="0" rIns="0" bIns="0" rtlCol="0" anchor="ctr"/>
+          <a:lstStyle/>
+          <a:p>
+            <a:pPr indent="0" marL="0">
+              <a:buNone/>
+            </a:pPr>
+            <a:r>
+              <a:rPr lang="en-US" sz="1500" dirty="0">
                 <a:solidFill>
                   <a:srgbClr val="9BB0D8"/>
                 </a:solidFill>
@@ -1771,9 +1860,9 @@
                 <a:ea typeface="Calibri" pitchFamily="34" charset="-122"/>
                 <a:cs typeface="Calibri" pitchFamily="34" charset="-120"/>
               </a:rPr>
-              <a:t>Code in Cursor with AI  ·  save with Git  ·  live-sync with Rojo  ·  test &amp; publish in Roblox Studio</a:t>
-            </a:r>
-            <a:endParaRPr lang="en-US" sz="1600" dirty="0"/>
+              <a:t>Cursor + AI  ·  Git  ·  Rojo live-sync  ·  Roblox Studio  ·  Studio MCP (Cursor sees your live game)</a:t>
+            </a:r>
+            <a:endParaRPr lang="en-US" sz="1500" dirty="0"/>
           </a:p>
         </p:txBody>
       </p:sp>
@@ -1785,8 +1874,8 @@
         </p:nvSpPr>
         <p:spPr>
           <a:xfrm>
-            <a:off x="658368" y="5029200"/>
-            <a:ext cx="2468880" cy="457200"/>
+            <a:off x="658368" y="4983480"/>
+            <a:ext cx="2331720" cy="457200"/>
           </a:xfrm>
           <a:prstGeom prst="roundRect">
             <a:avLst>
@@ -1812,7 +1901,7 @@
         </p:nvSpPr>
         <p:spPr>
           <a:xfrm>
-            <a:off x="822960" y="5175504"/>
+            <a:off x="822960" y="5129784"/>
             <a:ext cx="164592" cy="164592"/>
           </a:xfrm>
           <a:prstGeom prst="ellipse">
@@ -1832,8 +1921,8 @@
         </p:nvSpPr>
         <p:spPr>
           <a:xfrm>
-            <a:off x="1042416" y="5029200"/>
-            <a:ext cx="2011680" cy="457200"/>
+            <a:off x="1042416" y="4983480"/>
+            <a:ext cx="1874520" cy="457200"/>
           </a:xfrm>
           <a:prstGeom prst="rect">
             <a:avLst/>
@@ -1849,7 +1938,7 @@
               <a:buNone/>
             </a:pPr>
             <a:r>
-              <a:rPr lang="en-US" sz="1250" b="1" dirty="0">
+              <a:rPr lang="en-US" sz="1200" b="1" dirty="0">
                 <a:solidFill>
                   <a:srgbClr val="EAF0FF"/>
                 </a:solidFill>
@@ -1857,9 +1946,9 @@
                 <a:ea typeface="Calibri" pitchFamily="34" charset="-122"/>
                 <a:cs typeface="Calibri" pitchFamily="34" charset="-120"/>
               </a:rPr>
-              <a:t>Cursor (AI editor)</a:t>
-            </a:r>
-            <a:endParaRPr lang="en-US" sz="1250" dirty="0"/>
+              <a:t>Cursor (AI)</a:t>
+            </a:r>
+            <a:endParaRPr lang="en-US" sz="1200" dirty="0"/>
           </a:p>
         </p:txBody>
       </p:sp>
@@ -1871,8 +1960,8 @@
         </p:nvSpPr>
         <p:spPr>
           <a:xfrm>
-            <a:off x="3291840" y="5029200"/>
-            <a:ext cx="2286000" cy="457200"/>
+            <a:off x="3154680" y="4983480"/>
+            <a:ext cx="2148840" cy="457200"/>
           </a:xfrm>
           <a:prstGeom prst="roundRect">
             <a:avLst>
@@ -1898,7 +1987,7 @@
         </p:nvSpPr>
         <p:spPr>
           <a:xfrm>
-            <a:off x="3456432" y="5175504"/>
+            <a:off x="3319272" y="5129784"/>
             <a:ext cx="164592" cy="164592"/>
           </a:xfrm>
           <a:prstGeom prst="ellipse">
@@ -1918,8 +2007,8 @@
         </p:nvSpPr>
         <p:spPr>
           <a:xfrm>
-            <a:off x="3675888" y="5029200"/>
-            <a:ext cx="1828800" cy="457200"/>
+            <a:off x="3538728" y="4983480"/>
+            <a:ext cx="1691640" cy="457200"/>
           </a:xfrm>
           <a:prstGeom prst="rect">
             <a:avLst/>
@@ -1935,7 +2024,7 @@
               <a:buNone/>
             </a:pPr>
             <a:r>
-              <a:rPr lang="en-US" sz="1250" b="1" dirty="0">
+              <a:rPr lang="en-US" sz="1200" b="1" dirty="0">
                 <a:solidFill>
                   <a:srgbClr val="EAF0FF"/>
                 </a:solidFill>
@@ -1945,7 +2034,7 @@
               </a:rPr>
               <a:t>Git + GitHub</a:t>
             </a:r>
-            <a:endParaRPr lang="en-US" sz="1250" dirty="0"/>
+            <a:endParaRPr lang="en-US" sz="1200" dirty="0"/>
           </a:p>
         </p:txBody>
       </p:sp>
@@ -1957,8 +2046,8 @@
         </p:nvSpPr>
         <p:spPr>
           <a:xfrm>
-            <a:off x="5760720" y="5029200"/>
-            <a:ext cx="2286000" cy="457200"/>
+            <a:off x="5468112" y="4983480"/>
+            <a:ext cx="2148840" cy="457200"/>
           </a:xfrm>
           <a:prstGeom prst="roundRect">
             <a:avLst>
@@ -1984,7 +2073,7 @@
         </p:nvSpPr>
         <p:spPr>
           <a:xfrm>
-            <a:off x="5925312" y="5175504"/>
+            <a:off x="5632704" y="5129784"/>
             <a:ext cx="164592" cy="164592"/>
           </a:xfrm>
           <a:prstGeom prst="ellipse">
@@ -2004,8 +2093,8 @@
         </p:nvSpPr>
         <p:spPr>
           <a:xfrm>
-            <a:off x="6144768" y="5029200"/>
-            <a:ext cx="1828800" cy="457200"/>
+            <a:off x="5852160" y="4983480"/>
+            <a:ext cx="1691640" cy="457200"/>
           </a:xfrm>
           <a:prstGeom prst="rect">
             <a:avLst/>
@@ -2021,7 +2110,7 @@
               <a:buNone/>
             </a:pPr>
             <a:r>
-              <a:rPr lang="en-US" sz="1250" b="1" dirty="0">
+              <a:rPr lang="en-US" sz="1200" b="1" dirty="0">
                 <a:solidFill>
                   <a:srgbClr val="EAF0FF"/>
                 </a:solidFill>
@@ -2029,9 +2118,9 @@
                 <a:ea typeface="Calibri" pitchFamily="34" charset="-122"/>
                 <a:cs typeface="Calibri" pitchFamily="34" charset="-120"/>
               </a:rPr>
-              <a:t>Rojo live-sync</a:t>
-            </a:r>
-            <a:endParaRPr lang="en-US" sz="1250" dirty="0"/>
+              <a:t>Rojo sync</a:t>
+            </a:r>
+            <a:endParaRPr lang="en-US" sz="1200" dirty="0"/>
           </a:p>
         </p:txBody>
       </p:sp>
@@ -2043,8 +2132,8 @@
         </p:nvSpPr>
         <p:spPr>
           <a:xfrm>
-            <a:off x="8229600" y="5029200"/>
-            <a:ext cx="2468880" cy="457200"/>
+            <a:off x="7781544" y="4983480"/>
+            <a:ext cx="2103120" cy="457200"/>
           </a:xfrm>
           <a:prstGeom prst="roundRect">
             <a:avLst>
@@ -2070,7 +2159,7 @@
         </p:nvSpPr>
         <p:spPr>
           <a:xfrm>
-            <a:off x="8394192" y="5175504"/>
+            <a:off x="7946136" y="5129784"/>
             <a:ext cx="164592" cy="164592"/>
           </a:xfrm>
           <a:prstGeom prst="ellipse">
@@ -2090,8 +2179,8 @@
         </p:nvSpPr>
         <p:spPr>
           <a:xfrm>
-            <a:off x="8613648" y="5029200"/>
-            <a:ext cx="2011680" cy="457200"/>
+            <a:off x="8165592" y="4983480"/>
+            <a:ext cx="1645920" cy="457200"/>
           </a:xfrm>
           <a:prstGeom prst="rect">
             <a:avLst/>
@@ -2107,7 +2196,7 @@
               <a:buNone/>
             </a:pPr>
             <a:r>
-              <a:rPr lang="en-US" sz="1250" b="1" dirty="0">
+              <a:rPr lang="en-US" sz="1200" b="1" dirty="0">
                 <a:solidFill>
                   <a:srgbClr val="EAF0FF"/>
                 </a:solidFill>
@@ -2115,21 +2204,107 @@
                 <a:ea typeface="Calibri" pitchFamily="34" charset="-122"/>
                 <a:cs typeface="Calibri" pitchFamily="34" charset="-120"/>
               </a:rPr>
-              <a:t>Roblox Studio</a:t>
-            </a:r>
-            <a:endParaRPr lang="en-US" sz="1250" dirty="0"/>
-          </a:p>
-        </p:txBody>
-      </p:sp>
-      <p:sp>
-        <p:nvSpPr>
-          <p:cNvPr id="20" name="Text 18"/>
-          <p:cNvSpPr/>
-          <p:nvPr/>
-        </p:nvSpPr>
-        <p:spPr>
-          <a:xfrm>
-            <a:off x="658368" y="5943600"/>
+              <a:t>Studio</a:t>
+            </a:r>
+            <a:endParaRPr lang="en-US" sz="1200" dirty="0"/>
+          </a:p>
+        </p:txBody>
+      </p:sp>
+      <p:sp>
+        <p:nvSpPr>
+          <p:cNvPr id="20" name="Shape 18"/>
+          <p:cNvSpPr/>
+          <p:nvPr/>
+        </p:nvSpPr>
+        <p:spPr>
+          <a:xfrm>
+            <a:off x="10058400" y="4983480"/>
+            <a:ext cx="1554480" cy="457200"/>
+          </a:xfrm>
+          <a:prstGeom prst="roundRect">
+            <a:avLst>
+              <a:gd name="adj" fmla="val 50000"/>
+            </a:avLst>
+          </a:prstGeom>
+          <a:solidFill>
+            <a:srgbClr val="151E47"/>
+          </a:solidFill>
+          <a:ln w="12700">
+            <a:solidFill>
+              <a:srgbClr val="2A3870"/>
+            </a:solidFill>
+            <a:prstDash val="solid"/>
+          </a:ln>
+        </p:spPr>
+      </p:sp>
+      <p:sp>
+        <p:nvSpPr>
+          <p:cNvPr id="21" name="Shape 19"/>
+          <p:cNvSpPr/>
+          <p:nvPr/>
+        </p:nvSpPr>
+        <p:spPr>
+          <a:xfrm>
+            <a:off x="10222992" y="5129784"/>
+            <a:ext cx="164592" cy="164592"/>
+          </a:xfrm>
+          <a:prstGeom prst="ellipse">
+            <a:avLst/>
+          </a:prstGeom>
+          <a:solidFill>
+            <a:srgbClr val="8A5BFF"/>
+          </a:solidFill>
+          <a:ln/>
+        </p:spPr>
+      </p:sp>
+      <p:sp>
+        <p:nvSpPr>
+          <p:cNvPr id="22" name="Text 20"/>
+          <p:cNvSpPr/>
+          <p:nvPr/>
+        </p:nvSpPr>
+        <p:spPr>
+          <a:xfrm>
+            <a:off x="10442448" y="4983480"/>
+            <a:ext cx="1097280" cy="457200"/>
+          </a:xfrm>
+          <a:prstGeom prst="rect">
+            <a:avLst/>
+          </a:prstGeom>
+          <a:noFill/>
+          <a:ln/>
+        </p:spPr>
+        <p:txBody>
+          <a:bodyPr wrap="square" lIns="0" tIns="0" rIns="0" bIns="0" rtlCol="0" anchor="ctr"/>
+          <a:lstStyle/>
+          <a:p>
+            <a:pPr algn="l" indent="0" marL="0">
+              <a:buNone/>
+            </a:pPr>
+            <a:r>
+              <a:rPr lang="en-US" sz="1200" b="1" dirty="0">
+                <a:solidFill>
+                  <a:srgbClr val="EAF0FF"/>
+                </a:solidFill>
+                <a:latin typeface="Calibri" pitchFamily="34" charset="0"/>
+                <a:ea typeface="Calibri" pitchFamily="34" charset="-122"/>
+                <a:cs typeface="Calibri" pitchFamily="34" charset="-120"/>
+              </a:rPr>
+              <a:t>MCP</a:t>
+            </a:r>
+            <a:endParaRPr lang="en-US" sz="1200" dirty="0"/>
+          </a:p>
+        </p:txBody>
+      </p:sp>
+      <p:sp>
+        <p:nvSpPr>
+          <p:cNvPr id="23" name="Text 21"/>
+          <p:cNvSpPr/>
+          <p:nvPr/>
+        </p:nvSpPr>
+        <p:spPr>
+          <a:xfrm>
+            <a:off x="658368" y="5897880"/>
             <a:ext cx="10058400" cy="365760"/>
           </a:xfrm>
           <a:prstGeom prst="rect">
@@ -2155,6 +2330,244 @@
                 <a:cs typeface="Calibri" pitchFamily="34" charset="-120"/>
               </a:rPr>
               <a:t>A setup playbook for a 14+ creator learning Luau</a:t>
+            </a:r>
+            <a:endParaRPr lang="en-US" sz="1300" dirty="0"/>
+          </a:p>
+        </p:txBody>
+      </p:sp>
+    </p:spTree>
+  </p:cSld>
+  <p:clrMapOvr>
+    <a:masterClrMapping/>
+  </p:clrMapOvr>
+</p:sld>
+</file>
+
+<file path=ppt/slides/slide10.xml><?xml version="1.0" encoding="utf-8"?>
+<p:sld xmlns:a="http://schemas.openxmlformats.org/drawingml/2006/main" xmlns:r="http://schemas.openxmlformats.org/officeDocument/2006/relationships" xmlns:p="http://schemas.openxmlformats.org/presentationml/2006/main">
+  <p:cSld name="Slide 10">
+    <p:bg>
+      <p:bgPr>
+        <a:solidFill>
+          <a:srgbClr val="070B22"/>
+        </a:solidFill>
+      </p:bgPr>
+    </p:bg>
+    <p:spTree>
+      <p:nvGrpSpPr>
+        <p:cNvPr id="1" name=""/>
+        <p:cNvGrpSpPr/>
+        <p:nvPr/>
+      </p:nvGrpSpPr>
+      <p:grpSpPr>
+        <a:xfrm>
+          <a:off x="0" y="0"/>
+          <a:ext cx="0" cy="0"/>
+          <a:chOff x="0" y="0"/>
+          <a:chExt cx="0" cy="0"/>
+        </a:xfrm>
+      </p:grpSpPr>
+      <p:sp>
+        <p:nvSpPr>
+          <p:cNvPr id="2" name="Shape 0"/>
+          <p:cNvSpPr/>
+          <p:nvPr/>
+        </p:nvSpPr>
+        <p:spPr>
+          <a:xfrm>
+            <a:off x="8046720" y="3474720"/>
+            <a:ext cx="5486400" cy="5486400"/>
+          </a:xfrm>
+          <a:prstGeom prst="ellipse">
+            <a:avLst/>
+          </a:prstGeom>
+          <a:solidFill>
+            <a:srgbClr val="FF3DB0">
+              <a:alpha val="16000"/>
+            </a:srgbClr>
+          </a:solidFill>
+          <a:ln/>
+        </p:spPr>
+      </p:sp>
+      <p:sp>
+        <p:nvSpPr>
+          <p:cNvPr id="3" name="Shape 1"/>
+          <p:cNvSpPr/>
+          <p:nvPr/>
+        </p:nvSpPr>
+        <p:spPr>
+          <a:xfrm>
+            <a:off x="-1371600" y="-1371600"/>
+            <a:ext cx="4572000" cy="4572000"/>
+          </a:xfrm>
+          <a:prstGeom prst="ellipse">
+            <a:avLst/>
+          </a:prstGeom>
+          <a:solidFill>
+            <a:srgbClr val="00E5FF">
+              <a:alpha val="15000"/>
+            </a:srgbClr>
+          </a:solidFill>
+          <a:ln/>
+        </p:spPr>
+      </p:sp>
+      <p:sp>
+        <p:nvSpPr>
+          <p:cNvPr id="4" name="Text 2"/>
+          <p:cNvSpPr/>
+          <p:nvPr/>
+        </p:nvSpPr>
+        <p:spPr>
+          <a:xfrm>
+            <a:off x="731520" y="2194560"/>
+            <a:ext cx="11338560" cy="1005840"/>
+          </a:xfrm>
+          <a:prstGeom prst="rect">
+            <a:avLst/>
+          </a:prstGeom>
+          <a:noFill/>
+          <a:ln/>
+        </p:spPr>
+        <p:txBody>
+          <a:bodyPr wrap="square" lIns="0" tIns="0" rIns="0" bIns="0" rtlCol="0" anchor="ctr"/>
+          <a:lstStyle/>
+          <a:p>
+            <a:pPr indent="0" marL="0">
+              <a:buNone/>
+            </a:pPr>
+            <a:r>
+              <a:rPr lang="en-US" sz="4000" b="1" dirty="0">
+                <a:solidFill>
+                  <a:srgbClr val="00E5FF"/>
+                </a:solidFill>
+                <a:latin typeface="Calibri" pitchFamily="34" charset="0"/>
+                <a:ea typeface="Calibri" pitchFamily="34" charset="-122"/>
+                <a:cs typeface="Calibri" pitchFamily="34" charset="-120"/>
+              </a:rPr>
+              <a:t>Match. Serve. Connect. Sync. See it all.</a:t>
+            </a:r>
+            <a:endParaRPr lang="en-US" sz="4000" dirty="0"/>
+          </a:p>
+        </p:txBody>
+      </p:sp>
+      <p:sp>
+        <p:nvSpPr>
+          <p:cNvPr id="5" name="Text 3"/>
+          <p:cNvSpPr/>
+          <p:nvPr/>
+        </p:nvSpPr>
+        <p:spPr>
+          <a:xfrm>
+            <a:off x="749808" y="3291840"/>
+            <a:ext cx="10515600" cy="914400"/>
+          </a:xfrm>
+          <a:prstGeom prst="rect">
+            <a:avLst/>
+          </a:prstGeom>
+          <a:noFill/>
+          <a:ln/>
+        </p:spPr>
+        <p:txBody>
+          <a:bodyPr wrap="square" lIns="0" tIns="0" rIns="0" bIns="0" rtlCol="0" anchor="ctr"/>
+          <a:lstStyle/>
+          <a:p>
+            <a:pPr indent="0" marL="0">
+              <a:lnSpc>
+                <a:spcPct val="110000"/>
+              </a:lnSpc>
+              <a:buNone/>
+            </a:pPr>
+            <a:r>
+              <a:rPr lang="en-US" sz="1700" dirty="0">
+                <a:solidFill>
+                  <a:srgbClr val="EAF0FF"/>
+                </a:solidFill>
+                <a:latin typeface="Calibri" pitchFamily="34" charset="0"/>
+                <a:ea typeface="Calibri" pitchFamily="34" charset="-122"/>
+                <a:cs typeface="Calibri" pitchFamily="34" charset="-120"/>
+              </a:rPr>
+              <a:t>Rojo syncs your files IN, the Studio MCP reads the live game OUT, and Cursor's AI sees the whole picture.</a:t>
+            </a:r>
+            <a:endParaRPr lang="en-US" sz="1700" dirty="0"/>
+          </a:p>
+        </p:txBody>
+      </p:sp>
+      <p:sp>
+        <p:nvSpPr>
+          <p:cNvPr id="6" name="Text 4"/>
+          <p:cNvSpPr/>
+          <p:nvPr/>
+        </p:nvSpPr>
+        <p:spPr>
+          <a:xfrm>
+            <a:off x="749808" y="4434840"/>
+            <a:ext cx="10515600" cy="640080"/>
+          </a:xfrm>
+          <a:prstGeom prst="rect">
+            <a:avLst/>
+          </a:prstGeom>
+          <a:noFill/>
+          <a:ln/>
+        </p:spPr>
+        <p:txBody>
+          <a:bodyPr wrap="square" lIns="0" tIns="0" rIns="0" bIns="0" rtlCol="0" anchor="ctr"/>
+          <a:lstStyle/>
+          <a:p>
+            <a:pPr indent="0" marL="0">
+              <a:lnSpc>
+                <a:spcPct val="110000"/>
+              </a:lnSpc>
+              <a:buNone/>
+            </a:pPr>
+            <a:r>
+              <a:rPr lang="en-US" sz="1500" dirty="0">
+                <a:solidFill>
+                  <a:srgbClr val="9BB0D8"/>
+                </a:solidFill>
+                <a:latin typeface="Calibri" pitchFamily="34" charset="0"/>
+                <a:ea typeface="Calibri" pitchFamily="34" charset="-122"/>
+                <a:cs typeface="Calibri" pitchFamily="34" charset="-120"/>
+              </a:rPr>
+              <a:t>Tell Cursor what game you want - obby, tycoon, simulator - and build it on the baseplate, one saved file at a time.</a:t>
+            </a:r>
+            <a:endParaRPr lang="en-US" sz="1500" dirty="0"/>
+          </a:p>
+        </p:txBody>
+      </p:sp>
+      <p:sp>
+        <p:nvSpPr>
+          <p:cNvPr id="7" name="Text 5"/>
+          <p:cNvSpPr/>
+          <p:nvPr/>
+        </p:nvSpPr>
+        <p:spPr>
+          <a:xfrm>
+            <a:off x="749808" y="5303520"/>
+            <a:ext cx="10972800" cy="457200"/>
+          </a:xfrm>
+          <a:prstGeom prst="rect">
+            <a:avLst/>
+          </a:prstGeom>
+          <a:noFill/>
+          <a:ln/>
+        </p:spPr>
+        <p:txBody>
+          <a:bodyPr wrap="square" lIns="0" tIns="0" rIns="0" bIns="0" rtlCol="0" anchor="ctr"/>
+          <a:lstStyle/>
+          <a:p>
+            <a:pPr indent="0" marL="0">
+              <a:buNone/>
+            </a:pPr>
+            <a:r>
+              <a:rPr lang="en-US" sz="1300" i="1" dirty="0">
+                <a:solidFill>
+                  <a:srgbClr val="9BB0D8"/>
+                </a:solidFill>
+                <a:latin typeface="Calibri" pitchFamily="34" charset="0"/>
+                <a:ea typeface="Calibri" pitchFamily="34" charset="-122"/>
+                <a:cs typeface="Calibri" pitchFamily="34" charset="-120"/>
+              </a:rPr>
+              <a:t>Full illustrated guide: README.md + docs/index.html in the starter repo.</a:t>
             </a:r>
             <a:endParaRPr lang="en-US" sz="1300" dirty="0"/>
           </a:p>
@@ -3234,18 +3647,57 @@
       </p:sp>
       <p:sp>
         <p:nvSpPr>
-          <p:cNvPr id="4" name="Shape 2"/>
-          <p:cNvSpPr/>
-          <p:nvPr/>
-        </p:nvSpPr>
-        <p:spPr>
-          <a:xfrm>
-            <a:off x="685800" y="2331720"/>
-            <a:ext cx="2286000" cy="1188720"/>
+          <p:cNvPr id="4" name="Text 2"/>
+          <p:cNvSpPr/>
+          <p:nvPr/>
+        </p:nvSpPr>
+        <p:spPr>
+          <a:xfrm>
+            <a:off x="685800" y="1645920"/>
+            <a:ext cx="10972800" cy="274320"/>
+          </a:xfrm>
+          <a:prstGeom prst="rect">
+            <a:avLst/>
+          </a:prstGeom>
+          <a:noFill/>
+          <a:ln/>
+        </p:spPr>
+        <p:txBody>
+          <a:bodyPr wrap="square" lIns="0" tIns="0" rIns="0" bIns="0" rtlCol="0" anchor="ctr"/>
+          <a:lstStyle/>
+          <a:p>
+            <a:pPr indent="0" marL="0">
+              <a:buNone/>
+            </a:pPr>
+            <a:r>
+              <a:rPr lang="en-US" sz="1250" i="1" dirty="0">
+                <a:solidFill>
+                  <a:srgbClr val="00E5FF"/>
+                </a:solidFill>
+                <a:latin typeface="Calibri" pitchFamily="34" charset="0"/>
+                <a:ea typeface="Calibri" pitchFamily="34" charset="-122"/>
+                <a:cs typeface="Calibri" pitchFamily="34" charset="-120"/>
+              </a:rPr>
+              <a:t>Rojo pushes your code IN:</a:t>
+            </a:r>
+            <a:endParaRPr lang="en-US" sz="1250" dirty="0"/>
+          </a:p>
+        </p:txBody>
+      </p:sp>
+      <p:sp>
+        <p:nvSpPr>
+          <p:cNvPr id="5" name="Shape 3"/>
+          <p:cNvSpPr/>
+          <p:nvPr/>
+        </p:nvSpPr>
+        <p:spPr>
+          <a:xfrm>
+            <a:off x="685800" y="1965960"/>
+            <a:ext cx="2148840" cy="960120"/>
           </a:xfrm>
           <a:prstGeom prst="roundRect">
             <a:avLst>
-              <a:gd name="adj" fmla="val 9231"/>
+              <a:gd name="adj" fmla="val 11429"/>
             </a:avLst>
           </a:prstGeom>
           <a:solidFill>
@@ -3268,14 +3720,14 @@
       </p:sp>
       <p:sp>
         <p:nvSpPr>
-          <p:cNvPr id="5" name="Shape 3"/>
-          <p:cNvSpPr/>
-          <p:nvPr/>
-        </p:nvSpPr>
-        <p:spPr>
-          <a:xfrm>
-            <a:off x="1682496" y="2532888"/>
-            <a:ext cx="292608" cy="292608"/>
+          <p:cNvPr id="6" name="Shape 4"/>
+          <p:cNvSpPr/>
+          <p:nvPr/>
+        </p:nvSpPr>
+        <p:spPr>
+          <a:xfrm>
+            <a:off x="1632204" y="2112264"/>
+            <a:ext cx="256032" cy="256032"/>
           </a:xfrm>
           <a:prstGeom prst="ellipse">
             <a:avLst/>
@@ -3288,14 +3740,14 @@
       </p:sp>
       <p:sp>
         <p:nvSpPr>
-          <p:cNvPr id="6" name="Text 4"/>
-          <p:cNvSpPr/>
-          <p:nvPr/>
-        </p:nvSpPr>
-        <p:spPr>
-          <a:xfrm>
-            <a:off x="685800" y="2862072"/>
-            <a:ext cx="2286000" cy="320040"/>
+          <p:cNvPr id="7" name="Text 5"/>
+          <p:cNvSpPr/>
+          <p:nvPr/>
+        </p:nvSpPr>
+        <p:spPr>
+          <a:xfrm>
+            <a:off x="685800" y="2386584"/>
+            <a:ext cx="2148840" cy="274320"/>
           </a:xfrm>
           <a:prstGeom prst="rect">
             <a:avLst/>
@@ -3311,7 +3763,7 @@
               <a:buNone/>
             </a:pPr>
             <a:r>
-              <a:rPr lang="en-US" sz="1500" b="1" dirty="0">
+              <a:rPr lang="en-US" sz="1400" b="1" dirty="0">
                 <a:solidFill>
                   <a:srgbClr val="EAF0FF"/>
                 </a:solidFill>
@@ -3321,20 +3773,20 @@
               </a:rPr>
               <a:t>Cursor</a:t>
             </a:r>
-            <a:endParaRPr lang="en-US" sz="1500" dirty="0"/>
-          </a:p>
-        </p:txBody>
-      </p:sp>
-      <p:sp>
-        <p:nvSpPr>
-          <p:cNvPr id="7" name="Text 5"/>
-          <p:cNvSpPr/>
-          <p:nvPr/>
-        </p:nvSpPr>
-        <p:spPr>
-          <a:xfrm>
-            <a:off x="685800" y="3172968"/>
-            <a:ext cx="2286000" cy="274320"/>
+            <a:endParaRPr lang="en-US" sz="1400" dirty="0"/>
+          </a:p>
+        </p:txBody>
+      </p:sp>
+      <p:sp>
+        <p:nvSpPr>
+          <p:cNvPr id="8" name="Text 6"/>
+          <p:cNvSpPr/>
+          <p:nvPr/>
+        </p:nvSpPr>
+        <p:spPr>
+          <a:xfrm>
+            <a:off x="685800" y="2642616"/>
+            <a:ext cx="2148840" cy="237744"/>
           </a:xfrm>
           <a:prstGeom prst="rect">
             <a:avLst/>
@@ -3350,7 +3802,7 @@
               <a:buNone/>
             </a:pPr>
             <a:r>
-              <a:rPr lang="en-US" sz="1050" dirty="0">
+              <a:rPr lang="en-US" sz="1000" dirty="0">
                 <a:solidFill>
                   <a:srgbClr val="9BB0D8"/>
                 </a:solidFill>
@@ -3360,20 +3812,20 @@
               </a:rPr>
               <a:t>edit .luau</a:t>
             </a:r>
-            <a:endParaRPr lang="en-US" sz="1050" dirty="0"/>
-          </a:p>
-        </p:txBody>
-      </p:sp>
-      <p:sp>
-        <p:nvSpPr>
-          <p:cNvPr id="8" name="Shape 6"/>
-          <p:cNvSpPr/>
-          <p:nvPr/>
-        </p:nvSpPr>
-        <p:spPr>
-          <a:xfrm>
-            <a:off x="2999232" y="2926080"/>
-            <a:ext cx="502920" cy="0"/>
+            <a:endParaRPr lang="en-US" sz="1000" dirty="0"/>
+          </a:p>
+        </p:txBody>
+      </p:sp>
+      <p:sp>
+        <p:nvSpPr>
+          <p:cNvPr id="9" name="Shape 7"/>
+          <p:cNvSpPr/>
+          <p:nvPr/>
+        </p:nvSpPr>
+        <p:spPr>
+          <a:xfrm>
+            <a:off x="2852928" y="2441448"/>
+            <a:ext cx="457200" cy="0"/>
           </a:xfrm>
           <a:prstGeom prst="line">
             <a:avLst/>
@@ -3390,14 +3842,14 @@
       </p:sp>
       <p:sp>
         <p:nvSpPr>
-          <p:cNvPr id="9" name="Text 7"/>
-          <p:cNvSpPr/>
-          <p:nvPr/>
-        </p:nvSpPr>
-        <p:spPr>
-          <a:xfrm>
-            <a:off x="2724912" y="2487168"/>
-            <a:ext cx="1051560" cy="274320"/>
+          <p:cNvPr id="10" name="Text 8"/>
+          <p:cNvSpPr/>
+          <p:nvPr/>
+        </p:nvSpPr>
+        <p:spPr>
+          <a:xfrm>
+            <a:off x="2560320" y="2057400"/>
+            <a:ext cx="1051560" cy="256032"/>
           </a:xfrm>
           <a:prstGeom prst="rect">
             <a:avLst/>
@@ -3413,7 +3865,7 @@
               <a:buNone/>
             </a:pPr>
             <a:r>
-              <a:rPr lang="en-US" sz="1000" b="1" dirty="0">
+              <a:rPr lang="en-US" sz="950" b="1" dirty="0">
                 <a:solidFill>
                   <a:srgbClr val="FFD23F"/>
                 </a:solidFill>
@@ -3423,24 +3875,24 @@
               </a:rPr>
               <a:t>rojo serve</a:t>
             </a:r>
-            <a:endParaRPr lang="en-US" sz="1000" dirty="0"/>
-          </a:p>
-        </p:txBody>
-      </p:sp>
-      <p:sp>
-        <p:nvSpPr>
-          <p:cNvPr id="10" name="Shape 8"/>
-          <p:cNvSpPr/>
-          <p:nvPr/>
-        </p:nvSpPr>
-        <p:spPr>
-          <a:xfrm>
-            <a:off x="3538728" y="2331720"/>
-            <a:ext cx="2286000" cy="1188720"/>
+            <a:endParaRPr lang="en-US" sz="950" dirty="0"/>
+          </a:p>
+        </p:txBody>
+      </p:sp>
+      <p:sp>
+        <p:nvSpPr>
+          <p:cNvPr id="11" name="Shape 9"/>
+          <p:cNvSpPr/>
+          <p:nvPr/>
+        </p:nvSpPr>
+        <p:spPr>
+          <a:xfrm>
+            <a:off x="3337560" y="1965960"/>
+            <a:ext cx="2148840" cy="960120"/>
           </a:xfrm>
           <a:prstGeom prst="roundRect">
             <a:avLst>
-              <a:gd name="adj" fmla="val 9231"/>
+              <a:gd name="adj" fmla="val 11429"/>
             </a:avLst>
           </a:prstGeom>
           <a:solidFill>
@@ -3463,14 +3915,14 @@
       </p:sp>
       <p:sp>
         <p:nvSpPr>
-          <p:cNvPr id="11" name="Shape 9"/>
-          <p:cNvSpPr/>
-          <p:nvPr/>
-        </p:nvSpPr>
-        <p:spPr>
-          <a:xfrm>
-            <a:off x="4535424" y="2532888"/>
-            <a:ext cx="292608" cy="292608"/>
+          <p:cNvPr id="12" name="Shape 10"/>
+          <p:cNvSpPr/>
+          <p:nvPr/>
+        </p:nvSpPr>
+        <p:spPr>
+          <a:xfrm>
+            <a:off x="4283964" y="2112264"/>
+            <a:ext cx="256032" cy="256032"/>
           </a:xfrm>
           <a:prstGeom prst="ellipse">
             <a:avLst/>
@@ -3483,14 +3935,14 @@
       </p:sp>
       <p:sp>
         <p:nvSpPr>
-          <p:cNvPr id="12" name="Text 10"/>
-          <p:cNvSpPr/>
-          <p:nvPr/>
-        </p:nvSpPr>
-        <p:spPr>
-          <a:xfrm>
-            <a:off x="3538728" y="2862072"/>
-            <a:ext cx="2286000" cy="320040"/>
+          <p:cNvPr id="13" name="Text 11"/>
+          <p:cNvSpPr/>
+          <p:nvPr/>
+        </p:nvSpPr>
+        <p:spPr>
+          <a:xfrm>
+            <a:off x="3337560" y="2386584"/>
+            <a:ext cx="2148840" cy="274320"/>
           </a:xfrm>
           <a:prstGeom prst="rect">
             <a:avLst/>
@@ -3506,7 +3958,7 @@
               <a:buNone/>
             </a:pPr>
             <a:r>
-              <a:rPr lang="en-US" sz="1500" b="1" dirty="0">
+              <a:rPr lang="en-US" sz="1400" b="1" dirty="0">
                 <a:solidFill>
                   <a:srgbClr val="EAF0FF"/>
                 </a:solidFill>
@@ -3516,20 +3968,20 @@
               </a:rPr>
               <a:t>Rojo CLI</a:t>
             </a:r>
-            <a:endParaRPr lang="en-US" sz="1500" dirty="0"/>
-          </a:p>
-        </p:txBody>
-      </p:sp>
-      <p:sp>
-        <p:nvSpPr>
-          <p:cNvPr id="13" name="Text 11"/>
-          <p:cNvSpPr/>
-          <p:nvPr/>
-        </p:nvSpPr>
-        <p:spPr>
-          <a:xfrm>
-            <a:off x="3538728" y="3172968"/>
-            <a:ext cx="2286000" cy="274320"/>
+            <a:endParaRPr lang="en-US" sz="1400" dirty="0"/>
+          </a:p>
+        </p:txBody>
+      </p:sp>
+      <p:sp>
+        <p:nvSpPr>
+          <p:cNvPr id="14" name="Text 12"/>
+          <p:cNvSpPr/>
+          <p:nvPr/>
+        </p:nvSpPr>
+        <p:spPr>
+          <a:xfrm>
+            <a:off x="3337560" y="2642616"/>
+            <a:ext cx="2148840" cy="237744"/>
           </a:xfrm>
           <a:prstGeom prst="rect">
             <a:avLst/>
@@ -3545,7 +3997,7 @@
               <a:buNone/>
             </a:pPr>
             <a:r>
-              <a:rPr lang="en-US" sz="1050" dirty="0">
+              <a:rPr lang="en-US" sz="1000" dirty="0">
                 <a:solidFill>
                   <a:srgbClr val="9BB0D8"/>
                 </a:solidFill>
@@ -3555,20 +4007,20 @@
               </a:rPr>
               <a:t>localhost:34872</a:t>
             </a:r>
-            <a:endParaRPr lang="en-US" sz="1050" dirty="0"/>
-          </a:p>
-        </p:txBody>
-      </p:sp>
-      <p:sp>
-        <p:nvSpPr>
-          <p:cNvPr id="14" name="Shape 12"/>
-          <p:cNvSpPr/>
-          <p:nvPr/>
-        </p:nvSpPr>
-        <p:spPr>
-          <a:xfrm>
-            <a:off x="5852160" y="2926080"/>
-            <a:ext cx="502920" cy="0"/>
+            <a:endParaRPr lang="en-US" sz="1000" dirty="0"/>
+          </a:p>
+        </p:txBody>
+      </p:sp>
+      <p:sp>
+        <p:nvSpPr>
+          <p:cNvPr id="15" name="Shape 13"/>
+          <p:cNvSpPr/>
+          <p:nvPr/>
+        </p:nvSpPr>
+        <p:spPr>
+          <a:xfrm>
+            <a:off x="5504688" y="2441448"/>
+            <a:ext cx="457200" cy="0"/>
           </a:xfrm>
           <a:prstGeom prst="line">
             <a:avLst/>
@@ -3585,14 +4037,14 @@
       </p:sp>
       <p:sp>
         <p:nvSpPr>
-          <p:cNvPr id="15" name="Text 13"/>
-          <p:cNvSpPr/>
-          <p:nvPr/>
-        </p:nvSpPr>
-        <p:spPr>
-          <a:xfrm>
-            <a:off x="5577840" y="2487168"/>
-            <a:ext cx="1051560" cy="274320"/>
+          <p:cNvPr id="16" name="Text 14"/>
+          <p:cNvSpPr/>
+          <p:nvPr/>
+        </p:nvSpPr>
+        <p:spPr>
+          <a:xfrm>
+            <a:off x="5212080" y="2057400"/>
+            <a:ext cx="1051560" cy="256032"/>
           </a:xfrm>
           <a:prstGeom prst="rect">
             <a:avLst/>
@@ -3608,7 +4060,7 @@
               <a:buNone/>
             </a:pPr>
             <a:r>
-              <a:rPr lang="en-US" sz="1000" b="1" dirty="0">
+              <a:rPr lang="en-US" sz="950" b="1" dirty="0">
                 <a:solidFill>
                   <a:srgbClr val="00E5FF"/>
                 </a:solidFill>
@@ -3618,24 +4070,24 @@
               </a:rPr>
               <a:t>connect</a:t>
             </a:r>
-            <a:endParaRPr lang="en-US" sz="1000" dirty="0"/>
-          </a:p>
-        </p:txBody>
-      </p:sp>
-      <p:sp>
-        <p:nvSpPr>
-          <p:cNvPr id="16" name="Shape 14"/>
-          <p:cNvSpPr/>
-          <p:nvPr/>
-        </p:nvSpPr>
-        <p:spPr>
-          <a:xfrm>
-            <a:off x="6391656" y="2331720"/>
-            <a:ext cx="2286000" cy="1188720"/>
+            <a:endParaRPr lang="en-US" sz="950" dirty="0"/>
+          </a:p>
+        </p:txBody>
+      </p:sp>
+      <p:sp>
+        <p:nvSpPr>
+          <p:cNvPr id="17" name="Shape 15"/>
+          <p:cNvSpPr/>
+          <p:nvPr/>
+        </p:nvSpPr>
+        <p:spPr>
+          <a:xfrm>
+            <a:off x="5989320" y="1965960"/>
+            <a:ext cx="2148840" cy="960120"/>
           </a:xfrm>
           <a:prstGeom prst="roundRect">
             <a:avLst>
-              <a:gd name="adj" fmla="val 9231"/>
+              <a:gd name="adj" fmla="val 11429"/>
             </a:avLst>
           </a:prstGeom>
           <a:solidFill>
@@ -3658,14 +4110,14 @@
       </p:sp>
       <p:sp>
         <p:nvSpPr>
-          <p:cNvPr id="17" name="Shape 15"/>
-          <p:cNvSpPr/>
-          <p:nvPr/>
-        </p:nvSpPr>
-        <p:spPr>
-          <a:xfrm>
-            <a:off x="7388352" y="2532888"/>
-            <a:ext cx="292608" cy="292608"/>
+          <p:cNvPr id="18" name="Shape 16"/>
+          <p:cNvSpPr/>
+          <p:nvPr/>
+        </p:nvSpPr>
+        <p:spPr>
+          <a:xfrm>
+            <a:off x="6935724" y="2112264"/>
+            <a:ext cx="256032" cy="256032"/>
           </a:xfrm>
           <a:prstGeom prst="ellipse">
             <a:avLst/>
@@ -3678,14 +4130,14 @@
       </p:sp>
       <p:sp>
         <p:nvSpPr>
-          <p:cNvPr id="18" name="Text 16"/>
-          <p:cNvSpPr/>
-          <p:nvPr/>
-        </p:nvSpPr>
-        <p:spPr>
-          <a:xfrm>
-            <a:off x="6391656" y="2862072"/>
-            <a:ext cx="2286000" cy="320040"/>
+          <p:cNvPr id="19" name="Text 17"/>
+          <p:cNvSpPr/>
+          <p:nvPr/>
+        </p:nvSpPr>
+        <p:spPr>
+          <a:xfrm>
+            <a:off x="5989320" y="2386584"/>
+            <a:ext cx="2148840" cy="274320"/>
           </a:xfrm>
           <a:prstGeom prst="rect">
             <a:avLst/>
@@ -3701,7 +4153,7 @@
               <a:buNone/>
             </a:pPr>
             <a:r>
-              <a:rPr lang="en-US" sz="1500" b="1" dirty="0">
+              <a:rPr lang="en-US" sz="1400" b="1" dirty="0">
                 <a:solidFill>
                   <a:srgbClr val="EAF0FF"/>
                 </a:solidFill>
@@ -3711,20 +4163,20 @@
               </a:rPr>
               <a:t>Rojo plugin</a:t>
             </a:r>
-            <a:endParaRPr lang="en-US" sz="1500" dirty="0"/>
-          </a:p>
-        </p:txBody>
-      </p:sp>
-      <p:sp>
-        <p:nvSpPr>
-          <p:cNvPr id="19" name="Text 17"/>
-          <p:cNvSpPr/>
-          <p:nvPr/>
-        </p:nvSpPr>
-        <p:spPr>
-          <a:xfrm>
-            <a:off x="6391656" y="3172968"/>
-            <a:ext cx="2286000" cy="274320"/>
+            <a:endParaRPr lang="en-US" sz="1400" dirty="0"/>
+          </a:p>
+        </p:txBody>
+      </p:sp>
+      <p:sp>
+        <p:nvSpPr>
+          <p:cNvPr id="20" name="Text 18"/>
+          <p:cNvSpPr/>
+          <p:nvPr/>
+        </p:nvSpPr>
+        <p:spPr>
+          <a:xfrm>
+            <a:off x="5989320" y="2642616"/>
+            <a:ext cx="2148840" cy="237744"/>
           </a:xfrm>
           <a:prstGeom prst="rect">
             <a:avLst/>
@@ -3740,7 +4192,7 @@
               <a:buNone/>
             </a:pPr>
             <a:r>
-              <a:rPr lang="en-US" sz="1050" dirty="0">
+              <a:rPr lang="en-US" sz="1000" dirty="0">
                 <a:solidFill>
                   <a:srgbClr val="9BB0D8"/>
                 </a:solidFill>
@@ -3750,20 +4202,20 @@
               </a:rPr>
               <a:t>pulls files</a:t>
             </a:r>
-            <a:endParaRPr lang="en-US" sz="1050" dirty="0"/>
-          </a:p>
-        </p:txBody>
-      </p:sp>
-      <p:sp>
-        <p:nvSpPr>
-          <p:cNvPr id="20" name="Shape 18"/>
-          <p:cNvSpPr/>
-          <p:nvPr/>
-        </p:nvSpPr>
-        <p:spPr>
-          <a:xfrm>
-            <a:off x="8705088" y="2926080"/>
-            <a:ext cx="502920" cy="0"/>
+            <a:endParaRPr lang="en-US" sz="1000" dirty="0"/>
+          </a:p>
+        </p:txBody>
+      </p:sp>
+      <p:sp>
+        <p:nvSpPr>
+          <p:cNvPr id="21" name="Shape 19"/>
+          <p:cNvSpPr/>
+          <p:nvPr/>
+        </p:nvSpPr>
+        <p:spPr>
+          <a:xfrm>
+            <a:off x="8156448" y="2441448"/>
+            <a:ext cx="457200" cy="0"/>
           </a:xfrm>
           <a:prstGeom prst="line">
             <a:avLst/>
@@ -3780,14 +4232,14 @@
       </p:sp>
       <p:sp>
         <p:nvSpPr>
-          <p:cNvPr id="21" name="Text 19"/>
-          <p:cNvSpPr/>
-          <p:nvPr/>
-        </p:nvSpPr>
-        <p:spPr>
-          <a:xfrm>
-            <a:off x="8430768" y="2487168"/>
-            <a:ext cx="1051560" cy="274320"/>
+          <p:cNvPr id="22" name="Text 20"/>
+          <p:cNvSpPr/>
+          <p:nvPr/>
+        </p:nvSpPr>
+        <p:spPr>
+          <a:xfrm>
+            <a:off x="7863840" y="2057400"/>
+            <a:ext cx="1051560" cy="256032"/>
           </a:xfrm>
           <a:prstGeom prst="rect">
             <a:avLst/>
@@ -3803,7 +4255,7 @@
               <a:buNone/>
             </a:pPr>
             <a:r>
-              <a:rPr lang="en-US" sz="1000" b="1" dirty="0">
+              <a:rPr lang="en-US" sz="950" b="1" dirty="0">
                 <a:solidFill>
                   <a:srgbClr val="FF3DB0"/>
                 </a:solidFill>
@@ -3811,26 +4263,26 @@
                 <a:ea typeface="Calibri" pitchFamily="34" charset="-122"/>
                 <a:cs typeface="Calibri" pitchFamily="34" charset="-120"/>
               </a:rPr>
-              <a:t>appears in</a:t>
-            </a:r>
-            <a:endParaRPr lang="en-US" sz="1000" dirty="0"/>
-          </a:p>
-        </p:txBody>
-      </p:sp>
-      <p:sp>
-        <p:nvSpPr>
-          <p:cNvPr id="22" name="Shape 20"/>
-          <p:cNvSpPr/>
-          <p:nvPr/>
-        </p:nvSpPr>
-        <p:spPr>
-          <a:xfrm>
-            <a:off x="9244584" y="2331720"/>
-            <a:ext cx="2286000" cy="1188720"/>
+              <a:t>appears</a:t>
+            </a:r>
+            <a:endParaRPr lang="en-US" sz="950" dirty="0"/>
+          </a:p>
+        </p:txBody>
+      </p:sp>
+      <p:sp>
+        <p:nvSpPr>
+          <p:cNvPr id="23" name="Shape 21"/>
+          <p:cNvSpPr/>
+          <p:nvPr/>
+        </p:nvSpPr>
+        <p:spPr>
+          <a:xfrm>
+            <a:off x="8641080" y="1965960"/>
+            <a:ext cx="2148840" cy="960120"/>
           </a:xfrm>
           <a:prstGeom prst="roundRect">
             <a:avLst>
-              <a:gd name="adj" fmla="val 9231"/>
+              <a:gd name="adj" fmla="val 11429"/>
             </a:avLst>
           </a:prstGeom>
           <a:solidFill>
@@ -3853,14 +4305,14 @@
       </p:sp>
       <p:sp>
         <p:nvSpPr>
-          <p:cNvPr id="23" name="Shape 21"/>
-          <p:cNvSpPr/>
-          <p:nvPr/>
-        </p:nvSpPr>
-        <p:spPr>
-          <a:xfrm>
-            <a:off x="10241280" y="2532888"/>
-            <a:ext cx="292608" cy="292608"/>
+          <p:cNvPr id="24" name="Shape 22"/>
+          <p:cNvSpPr/>
+          <p:nvPr/>
+        </p:nvSpPr>
+        <p:spPr>
+          <a:xfrm>
+            <a:off x="9587484" y="2112264"/>
+            <a:ext cx="256032" cy="256032"/>
           </a:xfrm>
           <a:prstGeom prst="ellipse">
             <a:avLst/>
@@ -3873,14 +4325,14 @@
       </p:sp>
       <p:sp>
         <p:nvSpPr>
-          <p:cNvPr id="24" name="Text 22"/>
-          <p:cNvSpPr/>
-          <p:nvPr/>
-        </p:nvSpPr>
-        <p:spPr>
-          <a:xfrm>
-            <a:off x="9244584" y="2862072"/>
-            <a:ext cx="2286000" cy="320040"/>
+          <p:cNvPr id="25" name="Text 23"/>
+          <p:cNvSpPr/>
+          <p:nvPr/>
+        </p:nvSpPr>
+        <p:spPr>
+          <a:xfrm>
+            <a:off x="8641080" y="2386584"/>
+            <a:ext cx="2148840" cy="274320"/>
           </a:xfrm>
           <a:prstGeom prst="rect">
             <a:avLst/>
@@ -3896,7 +4348,7 @@
               <a:buNone/>
             </a:pPr>
             <a:r>
-              <a:rPr lang="en-US" sz="1500" b="1" dirty="0">
+              <a:rPr lang="en-US" sz="1400" b="1" dirty="0">
                 <a:solidFill>
                   <a:srgbClr val="EAF0FF"/>
                 </a:solidFill>
@@ -3906,20 +4358,20 @@
               </a:rPr>
               <a:t>Studio</a:t>
             </a:r>
-            <a:endParaRPr lang="en-US" sz="1500" dirty="0"/>
-          </a:p>
-        </p:txBody>
-      </p:sp>
-      <p:sp>
-        <p:nvSpPr>
-          <p:cNvPr id="25" name="Text 23"/>
-          <p:cNvSpPr/>
-          <p:nvPr/>
-        </p:nvSpPr>
-        <p:spPr>
-          <a:xfrm>
-            <a:off x="9244584" y="3172968"/>
-            <a:ext cx="2286000" cy="274320"/>
+            <a:endParaRPr lang="en-US" sz="1400" dirty="0"/>
+          </a:p>
+        </p:txBody>
+      </p:sp>
+      <p:sp>
+        <p:nvSpPr>
+          <p:cNvPr id="26" name="Text 24"/>
+          <p:cNvSpPr/>
+          <p:nvPr/>
+        </p:nvSpPr>
+        <p:spPr>
+          <a:xfrm>
+            <a:off x="8641080" y="2642616"/>
+            <a:ext cx="2148840" cy="237744"/>
           </a:xfrm>
           <a:prstGeom prst="rect">
             <a:avLst/>
@@ -3935,7 +4387,7 @@
               <a:buNone/>
             </a:pPr>
             <a:r>
-              <a:rPr lang="en-US" sz="1050" dirty="0">
+              <a:rPr lang="en-US" sz="1000" dirty="0">
                 <a:solidFill>
                   <a:srgbClr val="9BB0D8"/>
                 </a:solidFill>
@@ -3945,63 +4397,63 @@
               </a:rPr>
               <a:t>test + publish</a:t>
             </a:r>
-            <a:endParaRPr lang="en-US" sz="1050" dirty="0"/>
-          </a:p>
-        </p:txBody>
-      </p:sp>
-      <p:sp>
-        <p:nvSpPr>
-          <p:cNvPr id="26" name="Text 24"/>
-          <p:cNvSpPr/>
-          <p:nvPr/>
-        </p:nvSpPr>
-        <p:spPr>
-          <a:xfrm>
-            <a:off x="685800" y="3840480"/>
-            <a:ext cx="10515600" cy="320040"/>
-          </a:xfrm>
-          <a:prstGeom prst="rect">
-            <a:avLst/>
-          </a:prstGeom>
-          <a:noFill/>
-          <a:ln/>
-        </p:spPr>
-        <p:txBody>
-          <a:bodyPr wrap="square" lIns="0" tIns="0" rIns="0" bIns="0" rtlCol="0" anchor="ctr"/>
-          <a:lstStyle/>
-          <a:p>
-            <a:pPr indent="0" marL="0">
-              <a:buNone/>
-            </a:pPr>
-            <a:r>
-              <a:rPr lang="en-US" sz="1300" i="1" dirty="0">
-                <a:solidFill>
-                  <a:srgbClr val="9BB0D8"/>
-                </a:solidFill>
-                <a:latin typeface="Calibri" pitchFamily="34" charset="0"/>
-                <a:ea typeface="Calibri" pitchFamily="34" charset="-122"/>
-                <a:cs typeface="Calibri" pitchFamily="34" charset="-120"/>
-              </a:rPr>
-              <a:t>Meanwhile, on a separate track — Git just saves and backs up:</a:t>
-            </a:r>
-            <a:endParaRPr lang="en-US" sz="1300" dirty="0"/>
-          </a:p>
-        </p:txBody>
-      </p:sp>
-      <p:sp>
-        <p:nvSpPr>
-          <p:cNvPr id="27" name="Shape 25"/>
-          <p:cNvSpPr/>
-          <p:nvPr/>
-        </p:nvSpPr>
-        <p:spPr>
-          <a:xfrm>
-            <a:off x="685800" y="4297680"/>
-            <a:ext cx="2286000" cy="1188720"/>
+            <a:endParaRPr lang="en-US" sz="1000" dirty="0"/>
+          </a:p>
+        </p:txBody>
+      </p:sp>
+      <p:sp>
+        <p:nvSpPr>
+          <p:cNvPr id="27" name="Text 25"/>
+          <p:cNvSpPr/>
+          <p:nvPr/>
+        </p:nvSpPr>
+        <p:spPr>
+          <a:xfrm>
+            <a:off x="685800" y="3246120"/>
+            <a:ext cx="10972800" cy="274320"/>
+          </a:xfrm>
+          <a:prstGeom prst="rect">
+            <a:avLst/>
+          </a:prstGeom>
+          <a:noFill/>
+          <a:ln/>
+        </p:spPr>
+        <p:txBody>
+          <a:bodyPr wrap="square" lIns="0" tIns="0" rIns="0" bIns="0" rtlCol="0" anchor="ctr"/>
+          <a:lstStyle/>
+          <a:p>
+            <a:pPr indent="0" marL="0">
+              <a:buNone/>
+            </a:pPr>
+            <a:r>
+              <a:rPr lang="en-US" sz="1250" i="1" dirty="0">
+                <a:solidFill>
+                  <a:srgbClr val="23F0A0"/>
+                </a:solidFill>
+                <a:latin typeface="Calibri" pitchFamily="34" charset="0"/>
+                <a:ea typeface="Calibri" pitchFamily="34" charset="-122"/>
+                <a:cs typeface="Calibri" pitchFamily="34" charset="-120"/>
+              </a:rPr>
+              <a:t>Git saves on the side (optional):</a:t>
+            </a:r>
+            <a:endParaRPr lang="en-US" sz="1250" dirty="0"/>
+          </a:p>
+        </p:txBody>
+      </p:sp>
+      <p:sp>
+        <p:nvSpPr>
+          <p:cNvPr id="28" name="Shape 26"/>
+          <p:cNvSpPr/>
+          <p:nvPr/>
+        </p:nvSpPr>
+        <p:spPr>
+          <a:xfrm>
+            <a:off x="685800" y="3566160"/>
+            <a:ext cx="2148840" cy="960120"/>
           </a:xfrm>
           <a:prstGeom prst="roundRect">
             <a:avLst>
-              <a:gd name="adj" fmla="val 9231"/>
+              <a:gd name="adj" fmla="val 11429"/>
             </a:avLst>
           </a:prstGeom>
           <a:solidFill>
@@ -4024,14 +4476,14 @@
       </p:sp>
       <p:sp>
         <p:nvSpPr>
-          <p:cNvPr id="28" name="Shape 26"/>
-          <p:cNvSpPr/>
-          <p:nvPr/>
-        </p:nvSpPr>
-        <p:spPr>
-          <a:xfrm>
-            <a:off x="1682496" y="4498848"/>
-            <a:ext cx="292608" cy="292608"/>
+          <p:cNvPr id="29" name="Shape 27"/>
+          <p:cNvSpPr/>
+          <p:nvPr/>
+        </p:nvSpPr>
+        <p:spPr>
+          <a:xfrm>
+            <a:off x="1632204" y="3712464"/>
+            <a:ext cx="256032" cy="256032"/>
           </a:xfrm>
           <a:prstGeom prst="ellipse">
             <a:avLst/>
@@ -4044,14 +4496,14 @@
       </p:sp>
       <p:sp>
         <p:nvSpPr>
-          <p:cNvPr id="29" name="Text 27"/>
-          <p:cNvSpPr/>
-          <p:nvPr/>
-        </p:nvSpPr>
-        <p:spPr>
-          <a:xfrm>
-            <a:off x="685800" y="4828032"/>
-            <a:ext cx="2286000" cy="320040"/>
+          <p:cNvPr id="30" name="Text 28"/>
+          <p:cNvSpPr/>
+          <p:nvPr/>
+        </p:nvSpPr>
+        <p:spPr>
+          <a:xfrm>
+            <a:off x="685800" y="3986784"/>
+            <a:ext cx="2148840" cy="274320"/>
           </a:xfrm>
           <a:prstGeom prst="rect">
             <a:avLst/>
@@ -4067,7 +4519,7 @@
               <a:buNone/>
             </a:pPr>
             <a:r>
-              <a:rPr lang="en-US" sz="1500" b="1" dirty="0">
+              <a:rPr lang="en-US" sz="1400" b="1" dirty="0">
                 <a:solidFill>
                   <a:srgbClr val="EAF0FF"/>
                 </a:solidFill>
@@ -4077,20 +4529,20 @@
               </a:rPr>
               <a:t>Cursor</a:t>
             </a:r>
-            <a:endParaRPr lang="en-US" sz="1500" dirty="0"/>
-          </a:p>
-        </p:txBody>
-      </p:sp>
-      <p:sp>
-        <p:nvSpPr>
-          <p:cNvPr id="30" name="Text 28"/>
-          <p:cNvSpPr/>
-          <p:nvPr/>
-        </p:nvSpPr>
-        <p:spPr>
-          <a:xfrm>
-            <a:off x="685800" y="5138928"/>
-            <a:ext cx="2286000" cy="274320"/>
+            <a:endParaRPr lang="en-US" sz="1400" dirty="0"/>
+          </a:p>
+        </p:txBody>
+      </p:sp>
+      <p:sp>
+        <p:nvSpPr>
+          <p:cNvPr id="31" name="Text 29"/>
+          <p:cNvSpPr/>
+          <p:nvPr/>
+        </p:nvSpPr>
+        <p:spPr>
+          <a:xfrm>
+            <a:off x="685800" y="4242816"/>
+            <a:ext cx="2148840" cy="237744"/>
           </a:xfrm>
           <a:prstGeom prst="rect">
             <a:avLst/>
@@ -4106,7 +4558,7 @@
               <a:buNone/>
             </a:pPr>
             <a:r>
-              <a:rPr lang="en-US" sz="1050" dirty="0">
+              <a:rPr lang="en-US" sz="1000" dirty="0">
                 <a:solidFill>
                   <a:srgbClr val="9BB0D8"/>
                 </a:solidFill>
@@ -4116,20 +4568,20 @@
               </a:rPr>
               <a:t>save file</a:t>
             </a:r>
-            <a:endParaRPr lang="en-US" sz="1050" dirty="0"/>
-          </a:p>
-        </p:txBody>
-      </p:sp>
-      <p:sp>
-        <p:nvSpPr>
-          <p:cNvPr id="31" name="Shape 29"/>
-          <p:cNvSpPr/>
-          <p:nvPr/>
-        </p:nvSpPr>
-        <p:spPr>
-          <a:xfrm>
-            <a:off x="2999232" y="4892040"/>
-            <a:ext cx="502920" cy="0"/>
+            <a:endParaRPr lang="en-US" sz="1000" dirty="0"/>
+          </a:p>
+        </p:txBody>
+      </p:sp>
+      <p:sp>
+        <p:nvSpPr>
+          <p:cNvPr id="32" name="Shape 30"/>
+          <p:cNvSpPr/>
+          <p:nvPr/>
+        </p:nvSpPr>
+        <p:spPr>
+          <a:xfrm>
+            <a:off x="2852928" y="4041648"/>
+            <a:ext cx="457200" cy="0"/>
           </a:xfrm>
           <a:prstGeom prst="line">
             <a:avLst/>
@@ -4146,14 +4598,14 @@
       </p:sp>
       <p:sp>
         <p:nvSpPr>
-          <p:cNvPr id="32" name="Text 30"/>
-          <p:cNvSpPr/>
-          <p:nvPr/>
-        </p:nvSpPr>
-        <p:spPr>
-          <a:xfrm>
-            <a:off x="2724912" y="4453128"/>
-            <a:ext cx="1051560" cy="274320"/>
+          <p:cNvPr id="33" name="Text 31"/>
+          <p:cNvSpPr/>
+          <p:nvPr/>
+        </p:nvSpPr>
+        <p:spPr>
+          <a:xfrm>
+            <a:off x="2560320" y="3657600"/>
+            <a:ext cx="1051560" cy="256032"/>
           </a:xfrm>
           <a:prstGeom prst="rect">
             <a:avLst/>
@@ -4169,7 +4621,7 @@
               <a:buNone/>
             </a:pPr>
             <a:r>
-              <a:rPr lang="en-US" sz="1000" b="1" dirty="0">
+              <a:rPr lang="en-US" sz="950" b="1" dirty="0">
                 <a:solidFill>
                   <a:srgbClr val="23F0A0"/>
                 </a:solidFill>
@@ -4179,24 +4631,24 @@
               </a:rPr>
               <a:t>git commit</a:t>
             </a:r>
-            <a:endParaRPr lang="en-US" sz="1000" dirty="0"/>
-          </a:p>
-        </p:txBody>
-      </p:sp>
-      <p:sp>
-        <p:nvSpPr>
-          <p:cNvPr id="33" name="Shape 31"/>
-          <p:cNvSpPr/>
-          <p:nvPr/>
-        </p:nvSpPr>
-        <p:spPr>
-          <a:xfrm>
-            <a:off x="3538728" y="4297680"/>
-            <a:ext cx="2286000" cy="1188720"/>
+            <a:endParaRPr lang="en-US" sz="950" dirty="0"/>
+          </a:p>
+        </p:txBody>
+      </p:sp>
+      <p:sp>
+        <p:nvSpPr>
+          <p:cNvPr id="34" name="Shape 32"/>
+          <p:cNvSpPr/>
+          <p:nvPr/>
+        </p:nvSpPr>
+        <p:spPr>
+          <a:xfrm>
+            <a:off x="3337560" y="3566160"/>
+            <a:ext cx="2148840" cy="960120"/>
           </a:xfrm>
           <a:prstGeom prst="roundRect">
             <a:avLst>
-              <a:gd name="adj" fmla="val 9231"/>
+              <a:gd name="adj" fmla="val 11429"/>
             </a:avLst>
           </a:prstGeom>
           <a:solidFill>
@@ -4219,14 +4671,14 @@
       </p:sp>
       <p:sp>
         <p:nvSpPr>
-          <p:cNvPr id="34" name="Shape 32"/>
-          <p:cNvSpPr/>
-          <p:nvPr/>
-        </p:nvSpPr>
-        <p:spPr>
-          <a:xfrm>
-            <a:off x="4535424" y="4498848"/>
-            <a:ext cx="292608" cy="292608"/>
+          <p:cNvPr id="35" name="Shape 33"/>
+          <p:cNvSpPr/>
+          <p:nvPr/>
+        </p:nvSpPr>
+        <p:spPr>
+          <a:xfrm>
+            <a:off x="4283964" y="3712464"/>
+            <a:ext cx="256032" cy="256032"/>
           </a:xfrm>
           <a:prstGeom prst="ellipse">
             <a:avLst/>
@@ -4239,14 +4691,14 @@
       </p:sp>
       <p:sp>
         <p:nvSpPr>
-          <p:cNvPr id="35" name="Text 33"/>
-          <p:cNvSpPr/>
-          <p:nvPr/>
-        </p:nvSpPr>
-        <p:spPr>
-          <a:xfrm>
-            <a:off x="3538728" y="4828032"/>
-            <a:ext cx="2286000" cy="320040"/>
+          <p:cNvPr id="36" name="Text 34"/>
+          <p:cNvSpPr/>
+          <p:nvPr/>
+        </p:nvSpPr>
+        <p:spPr>
+          <a:xfrm>
+            <a:off x="3337560" y="3986784"/>
+            <a:ext cx="2148840" cy="274320"/>
           </a:xfrm>
           <a:prstGeom prst="rect">
             <a:avLst/>
@@ -4262,7 +4714,7 @@
               <a:buNone/>
             </a:pPr>
             <a:r>
-              <a:rPr lang="en-US" sz="1500" b="1" dirty="0">
+              <a:rPr lang="en-US" sz="1400" b="1" dirty="0">
                 <a:solidFill>
                   <a:srgbClr val="EAF0FF"/>
                 </a:solidFill>
@@ -4272,20 +4724,20 @@
               </a:rPr>
               <a:t>GitHub</a:t>
             </a:r>
-            <a:endParaRPr lang="en-US" sz="1500" dirty="0"/>
-          </a:p>
-        </p:txBody>
-      </p:sp>
-      <p:sp>
-        <p:nvSpPr>
-          <p:cNvPr id="36" name="Text 34"/>
-          <p:cNvSpPr/>
-          <p:nvPr/>
-        </p:nvSpPr>
-        <p:spPr>
-          <a:xfrm>
-            <a:off x="3538728" y="5138928"/>
-            <a:ext cx="2286000" cy="274320"/>
+            <a:endParaRPr lang="en-US" sz="1400" dirty="0"/>
+          </a:p>
+        </p:txBody>
+      </p:sp>
+      <p:sp>
+        <p:nvSpPr>
+          <p:cNvPr id="37" name="Text 35"/>
+          <p:cNvSpPr/>
+          <p:nvPr/>
+        </p:nvSpPr>
+        <p:spPr>
+          <a:xfrm>
+            <a:off x="3337560" y="4242816"/>
+            <a:ext cx="2148840" cy="237744"/>
           </a:xfrm>
           <a:prstGeom prst="rect">
             <a:avLst/>
@@ -4301,7 +4753,7 @@
               <a:buNone/>
             </a:pPr>
             <a:r>
-              <a:rPr lang="en-US" sz="1050" dirty="0">
+              <a:rPr lang="en-US" sz="1000" dirty="0">
                 <a:solidFill>
                   <a:srgbClr val="9BB0D8"/>
                 </a:solidFill>
@@ -4311,83 +4763,129 @@
               </a:rPr>
               <a:t>history + backup</a:t>
             </a:r>
-            <a:endParaRPr lang="en-US" sz="1050" dirty="0"/>
-          </a:p>
-        </p:txBody>
-      </p:sp>
-      <p:sp>
-        <p:nvSpPr>
-          <p:cNvPr id="37" name="Shape 35"/>
-          <p:cNvSpPr/>
-          <p:nvPr/>
-        </p:nvSpPr>
-        <p:spPr>
-          <a:xfrm>
-            <a:off x="6035040" y="4343400"/>
-            <a:ext cx="5486400" cy="1051560"/>
+            <a:endParaRPr lang="en-US" sz="1000" dirty="0"/>
+          </a:p>
+        </p:txBody>
+      </p:sp>
+      <p:sp>
+        <p:nvSpPr>
+          <p:cNvPr id="38" name="Text 36"/>
+          <p:cNvSpPr/>
+          <p:nvPr/>
+        </p:nvSpPr>
+        <p:spPr>
+          <a:xfrm>
+            <a:off x="685800" y="4846320"/>
+            <a:ext cx="10972800" cy="274320"/>
+          </a:xfrm>
+          <a:prstGeom prst="rect">
+            <a:avLst/>
+          </a:prstGeom>
+          <a:noFill/>
+          <a:ln/>
+        </p:spPr>
+        <p:txBody>
+          <a:bodyPr wrap="square" lIns="0" tIns="0" rIns="0" bIns="0" rtlCol="0" anchor="ctr"/>
+          <a:lstStyle/>
+          <a:p>
+            <a:pPr indent="0" marL="0">
+              <a:buNone/>
+            </a:pPr>
+            <a:r>
+              <a:rPr lang="en-US" sz="1250" i="1" dirty="0">
+                <a:solidFill>
+                  <a:srgbClr val="8A5BFF"/>
+                </a:solidFill>
+                <a:latin typeface="Calibri" pitchFamily="34" charset="0"/>
+                <a:ea typeface="Calibri" pitchFamily="34" charset="-122"/>
+                <a:cs typeface="Calibri" pitchFamily="34" charset="-120"/>
+              </a:rPr>
+              <a:t>MCP reads the live game OUT — the new superpower:</a:t>
+            </a:r>
+            <a:endParaRPr lang="en-US" sz="1250" dirty="0"/>
+          </a:p>
+        </p:txBody>
+      </p:sp>
+      <p:sp>
+        <p:nvSpPr>
+          <p:cNvPr id="39" name="Shape 37"/>
+          <p:cNvSpPr/>
+          <p:nvPr/>
+        </p:nvSpPr>
+        <p:spPr>
+          <a:xfrm>
+            <a:off x="685800" y="5166360"/>
+            <a:ext cx="2148840" cy="960120"/>
           </a:xfrm>
           <a:prstGeom prst="roundRect">
             <a:avLst>
-              <a:gd name="adj" fmla="val 8696"/>
+              <a:gd name="adj" fmla="val 11429"/>
             </a:avLst>
           </a:prstGeom>
           <a:solidFill>
-            <a:srgbClr val="1B265A"/>
+            <a:srgbClr val="151E47"/>
           </a:solidFill>
           <a:ln w="12700">
             <a:solidFill>
-              <a:srgbClr val="00E5FF"/>
+              <a:srgbClr val="2A3870"/>
             </a:solidFill>
             <a:prstDash val="solid"/>
           </a:ln>
-        </p:spPr>
-      </p:sp>
-      <p:sp>
-        <p:nvSpPr>
-          <p:cNvPr id="38" name="Text 36"/>
-          <p:cNvSpPr/>
-          <p:nvPr/>
-        </p:nvSpPr>
-        <p:spPr>
-          <a:xfrm>
-            <a:off x="6263640" y="4343400"/>
-            <a:ext cx="5029200" cy="1051560"/>
-          </a:xfrm>
-          <a:prstGeom prst="rect">
-            <a:avLst/>
-          </a:prstGeom>
-          <a:noFill/>
-          <a:ln/>
-        </p:spPr>
-        <p:txBody>
-          <a:bodyPr wrap="square" lIns="0" tIns="0" rIns="0" bIns="0" rtlCol="0" anchor="ctr"/>
-          <a:lstStyle/>
-          <a:p>
-            <a:pPr indent="0" marL="0">
-              <a:lnSpc>
-                <a:spcPct val="105000"/>
-              </a:lnSpc>
-              <a:buNone/>
-            </a:pPr>
-            <a:r>
-              <a:rPr lang="en-US" sz="1300" b="1" dirty="0">
-                <a:solidFill>
-                  <a:srgbClr val="00E5FF"/>
-                </a:solidFill>
-                <a:latin typeface="Calibri" pitchFamily="34" charset="0"/>
-                <a:ea typeface="Calibri" pitchFamily="34" charset="-122"/>
-                <a:cs typeface="Calibri" pitchFamily="34" charset="-120"/>
-              </a:rPr>
-              <a:t>Studio reads Rojo, never Git.  </a:t>
-            </a:r>
-            <a:pPr indent="0" marL="0">
-              <a:lnSpc>
-                <a:spcPct val="105000"/>
-              </a:lnSpc>
-              <a:buNone/>
-            </a:pPr>
-            <a:r>
-              <a:rPr lang="en-US" sz="1300" dirty="0">
+          <a:effectLst>
+            <a:outerShdw sx="100000" sy="100000" kx="0" ky="0" algn="bl" rotWithShape="0" blurRad="114300" dist="38100" dir="5400000">
+              <a:srgbClr val="000000">
+                <a:alpha val="35000"/>
+              </a:srgbClr>
+            </a:outerShdw>
+          </a:effectLst>
+        </p:spPr>
+      </p:sp>
+      <p:sp>
+        <p:nvSpPr>
+          <p:cNvPr id="40" name="Shape 38"/>
+          <p:cNvSpPr/>
+          <p:nvPr/>
+        </p:nvSpPr>
+        <p:spPr>
+          <a:xfrm>
+            <a:off x="1632204" y="5312664"/>
+            <a:ext cx="256032" cy="256032"/>
+          </a:xfrm>
+          <a:prstGeom prst="ellipse">
+            <a:avLst/>
+          </a:prstGeom>
+          <a:solidFill>
+            <a:srgbClr val="FF3DB0"/>
+          </a:solidFill>
+          <a:ln/>
+        </p:spPr>
+      </p:sp>
+      <p:sp>
+        <p:nvSpPr>
+          <p:cNvPr id="41" name="Text 39"/>
+          <p:cNvSpPr/>
+          <p:nvPr/>
+        </p:nvSpPr>
+        <p:spPr>
+          <a:xfrm>
+            <a:off x="685800" y="5586984"/>
+            <a:ext cx="2148840" cy="274320"/>
+          </a:xfrm>
+          <a:prstGeom prst="rect">
+            <a:avLst/>
+          </a:prstGeom>
+          <a:noFill/>
+          <a:ln/>
+        </p:spPr>
+        <p:txBody>
+          <a:bodyPr wrap="square" lIns="0" tIns="0" rIns="0" bIns="0" rtlCol="0" anchor="ctr"/>
+          <a:lstStyle/>
+          <a:p>
+            <a:pPr algn="ctr" indent="0" marL="0">
+              <a:buNone/>
+            </a:pPr>
+            <a:r>
+              <a:rPr lang="en-US" sz="1400" b="1" dirty="0">
                 <a:solidFill>
                   <a:srgbClr val="EAF0FF"/>
                 </a:solidFill>
@@ -4395,9 +4893,438 @@
                 <a:ea typeface="Calibri" pitchFamily="34" charset="-122"/>
                 <a:cs typeface="Calibri" pitchFamily="34" charset="-120"/>
               </a:rPr>
-              <a:t>The Rojo plugin talking to rojo serve is the only path code takes into Studio.</a:t>
-            </a:r>
-            <a:endParaRPr lang="en-US" sz="1300" dirty="0"/>
+              <a:t>Studio</a:t>
+            </a:r>
+            <a:endParaRPr lang="en-US" sz="1400" dirty="0"/>
+          </a:p>
+        </p:txBody>
+      </p:sp>
+      <p:sp>
+        <p:nvSpPr>
+          <p:cNvPr id="42" name="Text 40"/>
+          <p:cNvSpPr/>
+          <p:nvPr/>
+        </p:nvSpPr>
+        <p:spPr>
+          <a:xfrm>
+            <a:off x="685800" y="5843016"/>
+            <a:ext cx="2148840" cy="237744"/>
+          </a:xfrm>
+          <a:prstGeom prst="rect">
+            <a:avLst/>
+          </a:prstGeom>
+          <a:noFill/>
+          <a:ln/>
+        </p:spPr>
+        <p:txBody>
+          <a:bodyPr wrap="square" lIns="0" tIns="0" rIns="0" bIns="0" rtlCol="0" anchor="ctr"/>
+          <a:lstStyle/>
+          <a:p>
+            <a:pPr algn="ctr" indent="0" marL="0">
+              <a:buNone/>
+            </a:pPr>
+            <a:r>
+              <a:rPr lang="en-US" sz="1000" dirty="0">
+                <a:solidFill>
+                  <a:srgbClr val="9BB0D8"/>
+                </a:solidFill>
+                <a:latin typeface="Calibri" pitchFamily="34" charset="0"/>
+                <a:ea typeface="Calibri" pitchFamily="34" charset="-122"/>
+                <a:cs typeface="Calibri" pitchFamily="34" charset="-120"/>
+              </a:rPr>
+              <a:t>live game</a:t>
+            </a:r>
+            <a:endParaRPr lang="en-US" sz="1000" dirty="0"/>
+          </a:p>
+        </p:txBody>
+      </p:sp>
+      <p:sp>
+        <p:nvSpPr>
+          <p:cNvPr id="43" name="Shape 41"/>
+          <p:cNvSpPr/>
+          <p:nvPr/>
+        </p:nvSpPr>
+        <p:spPr>
+          <a:xfrm>
+            <a:off x="2852928" y="5641848"/>
+            <a:ext cx="457200" cy="0"/>
+          </a:xfrm>
+          <a:prstGeom prst="line">
+            <a:avLst/>
+          </a:prstGeom>
+          <a:noFill/>
+          <a:ln w="38100">
+            <a:solidFill>
+              <a:srgbClr val="8A5BFF"/>
+            </a:solidFill>
+            <a:prstDash val="dash"/>
+            <a:tailEnd type="triangle"/>
+          </a:ln>
+        </p:spPr>
+      </p:sp>
+      <p:sp>
+        <p:nvSpPr>
+          <p:cNvPr id="44" name="Text 42"/>
+          <p:cNvSpPr/>
+          <p:nvPr/>
+        </p:nvSpPr>
+        <p:spPr>
+          <a:xfrm>
+            <a:off x="2560320" y="5257800"/>
+            <a:ext cx="1051560" cy="256032"/>
+          </a:xfrm>
+          <a:prstGeom prst="rect">
+            <a:avLst/>
+          </a:prstGeom>
+          <a:noFill/>
+          <a:ln/>
+        </p:spPr>
+        <p:txBody>
+          <a:bodyPr wrap="square" lIns="0" tIns="0" rIns="0" bIns="0" rtlCol="0" anchor="ctr"/>
+          <a:lstStyle/>
+          <a:p>
+            <a:pPr algn="ctr" indent="0" marL="0">
+              <a:buNone/>
+            </a:pPr>
+            <a:r>
+              <a:rPr lang="en-US" sz="950" b="1" dirty="0">
+                <a:solidFill>
+                  <a:srgbClr val="8A5BFF"/>
+                </a:solidFill>
+                <a:latin typeface="Calibri" pitchFamily="34" charset="0"/>
+                <a:ea typeface="Calibri" pitchFamily="34" charset="-122"/>
+                <a:cs typeface="Calibri" pitchFamily="34" charset="-120"/>
+              </a:rPr>
+              <a:t>MCP reads</a:t>
+            </a:r>
+            <a:endParaRPr lang="en-US" sz="950" dirty="0"/>
+          </a:p>
+        </p:txBody>
+      </p:sp>
+      <p:sp>
+        <p:nvSpPr>
+          <p:cNvPr id="45" name="Shape 43"/>
+          <p:cNvSpPr/>
+          <p:nvPr/>
+        </p:nvSpPr>
+        <p:spPr>
+          <a:xfrm>
+            <a:off x="3337560" y="5166360"/>
+            <a:ext cx="2148840" cy="960120"/>
+          </a:xfrm>
+          <a:prstGeom prst="roundRect">
+            <a:avLst>
+              <a:gd name="adj" fmla="val 11429"/>
+            </a:avLst>
+          </a:prstGeom>
+          <a:solidFill>
+            <a:srgbClr val="151E47"/>
+          </a:solidFill>
+          <a:ln w="12700">
+            <a:solidFill>
+              <a:srgbClr val="2A3870"/>
+            </a:solidFill>
+            <a:prstDash val="solid"/>
+          </a:ln>
+          <a:effectLst>
+            <a:outerShdw sx="100000" sy="100000" kx="0" ky="0" algn="bl" rotWithShape="0" blurRad="114300" dist="38100" dir="5400000">
+              <a:srgbClr val="000000">
+                <a:alpha val="35000"/>
+              </a:srgbClr>
+            </a:outerShdw>
+          </a:effectLst>
+        </p:spPr>
+      </p:sp>
+      <p:sp>
+        <p:nvSpPr>
+          <p:cNvPr id="46" name="Shape 44"/>
+          <p:cNvSpPr/>
+          <p:nvPr/>
+        </p:nvSpPr>
+        <p:spPr>
+          <a:xfrm>
+            <a:off x="4283964" y="5312664"/>
+            <a:ext cx="256032" cy="256032"/>
+          </a:xfrm>
+          <a:prstGeom prst="ellipse">
+            <a:avLst/>
+          </a:prstGeom>
+          <a:solidFill>
+            <a:srgbClr val="8A5BFF"/>
+          </a:solidFill>
+          <a:ln/>
+        </p:spPr>
+      </p:sp>
+      <p:sp>
+        <p:nvSpPr>
+          <p:cNvPr id="47" name="Text 45"/>
+          <p:cNvSpPr/>
+          <p:nvPr/>
+        </p:nvSpPr>
+        <p:spPr>
+          <a:xfrm>
+            <a:off x="3337560" y="5586984"/>
+            <a:ext cx="2148840" cy="274320"/>
+          </a:xfrm>
+          <a:prstGeom prst="rect">
+            <a:avLst/>
+          </a:prstGeom>
+          <a:noFill/>
+          <a:ln/>
+        </p:spPr>
+        <p:txBody>
+          <a:bodyPr wrap="square" lIns="0" tIns="0" rIns="0" bIns="0" rtlCol="0" anchor="ctr"/>
+          <a:lstStyle/>
+          <a:p>
+            <a:pPr algn="ctr" indent="0" marL="0">
+              <a:buNone/>
+            </a:pPr>
+            <a:r>
+              <a:rPr lang="en-US" sz="1400" b="1" dirty="0">
+                <a:solidFill>
+                  <a:srgbClr val="EAF0FF"/>
+                </a:solidFill>
+                <a:latin typeface="Calibri" pitchFamily="34" charset="0"/>
+                <a:ea typeface="Calibri" pitchFamily="34" charset="-122"/>
+                <a:cs typeface="Calibri" pitchFamily="34" charset="-120"/>
+              </a:rPr>
+              <a:t>MCP</a:t>
+            </a:r>
+            <a:endParaRPr lang="en-US" sz="1400" dirty="0"/>
+          </a:p>
+        </p:txBody>
+      </p:sp>
+      <p:sp>
+        <p:nvSpPr>
+          <p:cNvPr id="48" name="Text 46"/>
+          <p:cNvSpPr/>
+          <p:nvPr/>
+        </p:nvSpPr>
+        <p:spPr>
+          <a:xfrm>
+            <a:off x="3337560" y="5843016"/>
+            <a:ext cx="2148840" cy="237744"/>
+          </a:xfrm>
+          <a:prstGeom prst="rect">
+            <a:avLst/>
+          </a:prstGeom>
+          <a:noFill/>
+          <a:ln/>
+        </p:spPr>
+        <p:txBody>
+          <a:bodyPr wrap="square" lIns="0" tIns="0" rIns="0" bIns="0" rtlCol="0" anchor="ctr"/>
+          <a:lstStyle/>
+          <a:p>
+            <a:pPr algn="ctr" indent="0" marL="0">
+              <a:buNone/>
+            </a:pPr>
+            <a:r>
+              <a:rPr lang="en-US" sz="1000" dirty="0">
+                <a:solidFill>
+                  <a:srgbClr val="9BB0D8"/>
+                </a:solidFill>
+                <a:latin typeface="Calibri" pitchFamily="34" charset="0"/>
+                <a:ea typeface="Calibri" pitchFamily="34" charset="-122"/>
+                <a:cs typeface="Calibri" pitchFamily="34" charset="-120"/>
+              </a:rPr>
+              <a:t>27 tools</a:t>
+            </a:r>
+            <a:endParaRPr lang="en-US" sz="1000" dirty="0"/>
+          </a:p>
+        </p:txBody>
+      </p:sp>
+      <p:sp>
+        <p:nvSpPr>
+          <p:cNvPr id="49" name="Shape 47"/>
+          <p:cNvSpPr/>
+          <p:nvPr/>
+        </p:nvSpPr>
+        <p:spPr>
+          <a:xfrm>
+            <a:off x="5504688" y="5641848"/>
+            <a:ext cx="457200" cy="0"/>
+          </a:xfrm>
+          <a:prstGeom prst="line">
+            <a:avLst/>
+          </a:prstGeom>
+          <a:noFill/>
+          <a:ln w="38100">
+            <a:solidFill>
+              <a:srgbClr val="8A5BFF"/>
+            </a:solidFill>
+            <a:prstDash val="dash"/>
+            <a:tailEnd type="triangle"/>
+          </a:ln>
+        </p:spPr>
+      </p:sp>
+      <p:sp>
+        <p:nvSpPr>
+          <p:cNvPr id="50" name="Text 48"/>
+          <p:cNvSpPr/>
+          <p:nvPr/>
+        </p:nvSpPr>
+        <p:spPr>
+          <a:xfrm>
+            <a:off x="5212080" y="5257800"/>
+            <a:ext cx="1051560" cy="256032"/>
+          </a:xfrm>
+          <a:prstGeom prst="rect">
+            <a:avLst/>
+          </a:prstGeom>
+          <a:noFill/>
+          <a:ln/>
+        </p:spPr>
+        <p:txBody>
+          <a:bodyPr wrap="square" lIns="0" tIns="0" rIns="0" bIns="0" rtlCol="0" anchor="ctr"/>
+          <a:lstStyle/>
+          <a:p>
+            <a:pPr algn="ctr" indent="0" marL="0">
+              <a:buNone/>
+            </a:pPr>
+            <a:r>
+              <a:rPr lang="en-US" sz="950" b="1" dirty="0">
+                <a:solidFill>
+                  <a:srgbClr val="8A5BFF"/>
+                </a:solidFill>
+                <a:latin typeface="Calibri" pitchFamily="34" charset="0"/>
+                <a:ea typeface="Calibri" pitchFamily="34" charset="-122"/>
+                <a:cs typeface="Calibri" pitchFamily="34" charset="-120"/>
+              </a:rPr>
+              <a:t>sees all</a:t>
+            </a:r>
+            <a:endParaRPr lang="en-US" sz="950" dirty="0"/>
+          </a:p>
+        </p:txBody>
+      </p:sp>
+      <p:sp>
+        <p:nvSpPr>
+          <p:cNvPr id="51" name="Shape 49"/>
+          <p:cNvSpPr/>
+          <p:nvPr/>
+        </p:nvSpPr>
+        <p:spPr>
+          <a:xfrm>
+            <a:off x="5989320" y="5166360"/>
+            <a:ext cx="2148840" cy="960120"/>
+          </a:xfrm>
+          <a:prstGeom prst="roundRect">
+            <a:avLst>
+              <a:gd name="adj" fmla="val 11429"/>
+            </a:avLst>
+          </a:prstGeom>
+          <a:solidFill>
+            <a:srgbClr val="151E47"/>
+          </a:solidFill>
+          <a:ln w="12700">
+            <a:solidFill>
+              <a:srgbClr val="2A3870"/>
+            </a:solidFill>
+            <a:prstDash val="solid"/>
+          </a:ln>
+          <a:effectLst>
+            <a:outerShdw sx="100000" sy="100000" kx="0" ky="0" algn="bl" rotWithShape="0" blurRad="114300" dist="38100" dir="5400000">
+              <a:srgbClr val="000000">
+                <a:alpha val="35000"/>
+              </a:srgbClr>
+            </a:outerShdw>
+          </a:effectLst>
+        </p:spPr>
+      </p:sp>
+      <p:sp>
+        <p:nvSpPr>
+          <p:cNvPr id="52" name="Shape 50"/>
+          <p:cNvSpPr/>
+          <p:nvPr/>
+        </p:nvSpPr>
+        <p:spPr>
+          <a:xfrm>
+            <a:off x="6935724" y="5312664"/>
+            <a:ext cx="256032" cy="256032"/>
+          </a:xfrm>
+          <a:prstGeom prst="ellipse">
+            <a:avLst/>
+          </a:prstGeom>
+          <a:solidFill>
+            <a:srgbClr val="8A5BFF"/>
+          </a:solidFill>
+          <a:ln/>
+        </p:spPr>
+      </p:sp>
+      <p:sp>
+        <p:nvSpPr>
+          <p:cNvPr id="53" name="Text 51"/>
+          <p:cNvSpPr/>
+          <p:nvPr/>
+        </p:nvSpPr>
+        <p:spPr>
+          <a:xfrm>
+            <a:off x="5989320" y="5586984"/>
+            <a:ext cx="2148840" cy="274320"/>
+          </a:xfrm>
+          <a:prstGeom prst="rect">
+            <a:avLst/>
+          </a:prstGeom>
+          <a:noFill/>
+          <a:ln/>
+        </p:spPr>
+        <p:txBody>
+          <a:bodyPr wrap="square" lIns="0" tIns="0" rIns="0" bIns="0" rtlCol="0" anchor="ctr"/>
+          <a:lstStyle/>
+          <a:p>
+            <a:pPr algn="ctr" indent="0" marL="0">
+              <a:buNone/>
+            </a:pPr>
+            <a:r>
+              <a:rPr lang="en-US" sz="1400" b="1" dirty="0">
+                <a:solidFill>
+                  <a:srgbClr val="EAF0FF"/>
+                </a:solidFill>
+                <a:latin typeface="Calibri" pitchFamily="34" charset="0"/>
+                <a:ea typeface="Calibri" pitchFamily="34" charset="-122"/>
+                <a:cs typeface="Calibri" pitchFamily="34" charset="-120"/>
+              </a:rPr>
+              <a:t>Cursor</a:t>
+            </a:r>
+            <a:endParaRPr lang="en-US" sz="1400" dirty="0"/>
+          </a:p>
+        </p:txBody>
+      </p:sp>
+      <p:sp>
+        <p:nvSpPr>
+          <p:cNvPr id="54" name="Text 52"/>
+          <p:cNvSpPr/>
+          <p:nvPr/>
+        </p:nvSpPr>
+        <p:spPr>
+          <a:xfrm>
+            <a:off x="5989320" y="5843016"/>
+            <a:ext cx="2148840" cy="237744"/>
+          </a:xfrm>
+          <a:prstGeom prst="rect">
+            <a:avLst/>
+          </a:prstGeom>
+          <a:noFill/>
+          <a:ln/>
+        </p:spPr>
+        <p:txBody>
+          <a:bodyPr wrap="square" lIns="0" tIns="0" rIns="0" bIns="0" rtlCol="0" anchor="ctr"/>
+          <a:lstStyle/>
+          <a:p>
+            <a:pPr algn="ctr" indent="0" marL="0">
+              <a:buNone/>
+            </a:pPr>
+            <a:r>
+              <a:rPr lang="en-US" sz="1000" dirty="0">
+                <a:solidFill>
+                  <a:srgbClr val="9BB0D8"/>
+                </a:solidFill>
+                <a:latin typeface="Calibri" pitchFamily="34" charset="0"/>
+                <a:ea typeface="Calibri" pitchFamily="34" charset="-122"/>
+                <a:cs typeface="Calibri" pitchFamily="34" charset="-120"/>
+              </a:rPr>
+              <a:t>sees everything</a:t>
+            </a:r>
+            <a:endParaRPr lang="en-US" sz="1000" dirty="0"/>
           </a:p>
         </p:txBody>
       </p:sp>
@@ -4505,7 +5432,7 @@
                 <a:ea typeface="Calibri" pitchFamily="34" charset="-122"/>
                 <a:cs typeface="Calibri" pitchFamily="34" charset="-120"/>
               </a:rPr>
-              <a:t>Git vs Rojo</a:t>
+              <a:t>Git vs Rojo (and MCP)</a:t>
             </a:r>
             <a:endParaRPr lang="en-US" sz="3800" dirty="0"/>
           </a:p>
@@ -4519,12 +5446,12 @@
         </p:nvSpPr>
         <p:spPr>
           <a:xfrm>
-            <a:off x="640080" y="1783080"/>
-            <a:ext cx="5212080" cy="2468880"/>
+            <a:off x="640080" y="1737360"/>
+            <a:ext cx="5212080" cy="2286000"/>
           </a:xfrm>
           <a:prstGeom prst="roundRect">
             <a:avLst>
-              <a:gd name="adj" fmla="val 4444"/>
+              <a:gd name="adj" fmla="val 4800"/>
             </a:avLst>
           </a:prstGeom>
           <a:solidFill>
@@ -4553,7 +5480,7 @@
         </p:nvSpPr>
         <p:spPr>
           <a:xfrm>
-            <a:off x="1005840" y="2148840"/>
+            <a:off x="1005840" y="2103120"/>
             <a:ext cx="502920" cy="502920"/>
           </a:xfrm>
           <a:prstGeom prst="ellipse">
@@ -4573,7 +5500,7 @@
         </p:nvSpPr>
         <p:spPr>
           <a:xfrm>
-            <a:off x="1691640" y="2167128"/>
+            <a:off x="1691640" y="2121408"/>
             <a:ext cx="4023360" cy="502920"/>
           </a:xfrm>
           <a:prstGeom prst="rect">
@@ -4590,7 +5517,7 @@
               <a:buNone/>
             </a:pPr>
             <a:r>
-              <a:rPr lang="en-US" sz="2200" b="1" dirty="0">
+              <a:rPr lang="en-US" sz="2100" b="1" dirty="0">
                 <a:solidFill>
                   <a:srgbClr val="EAF0FF"/>
                 </a:solidFill>
@@ -4600,7 +5527,7 @@
               </a:rPr>
               <a:t>Rojo (the bridge)</a:t>
             </a:r>
-            <a:endParaRPr lang="en-US" sz="2200" dirty="0"/>
+            <a:endParaRPr lang="en-US" sz="2100" dirty="0"/>
           </a:p>
         </p:txBody>
       </p:sp>
@@ -4612,8 +5539,8 @@
         </p:nvSpPr>
         <p:spPr>
           <a:xfrm>
-            <a:off x="1024128" y="2880360"/>
-            <a:ext cx="4480560" cy="868680"/>
+            <a:off x="1024128" y="2788920"/>
+            <a:ext cx="4480560" cy="777240"/>
           </a:xfrm>
           <a:prstGeom prst="rect">
             <a:avLst/>
@@ -4627,12 +5554,12 @@
           <a:p>
             <a:pPr indent="0" marL="0">
               <a:lnSpc>
-                <a:spcPct val="108000"/>
+                <a:spcPct val="105000"/>
               </a:lnSpc>
               <a:buNone/>
             </a:pPr>
             <a:r>
-              <a:rPr lang="en-US" sz="1400" dirty="0">
+              <a:rPr lang="en-US" sz="1350" dirty="0">
                 <a:solidFill>
                   <a:srgbClr val="9BB0D8"/>
                 </a:solidFill>
@@ -4640,9 +5567,9 @@
                 <a:ea typeface="Calibri" pitchFamily="34" charset="-122"/>
                 <a:cs typeface="Calibri" pitchFamily="34" charset="-120"/>
               </a:rPr>
-              <a:t>The Rojo plugin talks to the Rojo server and pulls your .luau files straight into Studio's Explorer. This is what makes files appear.</a:t>
-            </a:r>
-            <a:endParaRPr lang="en-US" sz="1400" dirty="0"/>
+              <a:t>The Rojo plugin talks to the Rojo server and pulls your .luau files straight into Studio's Explorer.</a:t>
+            </a:r>
+            <a:endParaRPr lang="en-US" sz="1350" dirty="0"/>
           </a:p>
         </p:txBody>
       </p:sp>
@@ -4654,12 +5581,12 @@
         </p:nvSpPr>
         <p:spPr>
           <a:xfrm>
-            <a:off x="1024128" y="3657600"/>
-            <a:ext cx="4443984" cy="411480"/>
+            <a:off x="1024128" y="3474720"/>
+            <a:ext cx="4443984" cy="384048"/>
           </a:xfrm>
           <a:prstGeom prst="roundRect">
             <a:avLst>
-              <a:gd name="adj" fmla="val 22222"/>
+              <a:gd name="adj" fmla="val 23810"/>
             </a:avLst>
           </a:prstGeom>
           <a:solidFill>
@@ -4681,8 +5608,8 @@
         </p:nvSpPr>
         <p:spPr>
           <a:xfrm>
-            <a:off x="1024128" y="3657600"/>
-            <a:ext cx="4443984" cy="411480"/>
+            <a:off x="1024128" y="3474720"/>
+            <a:ext cx="4443984" cy="384048"/>
           </a:xfrm>
           <a:prstGeom prst="rect">
             <a:avLst/>
@@ -4698,7 +5625,7 @@
               <a:buNone/>
             </a:pPr>
             <a:r>
-              <a:rPr lang="en-US" sz="1250" b="1" dirty="0">
+              <a:rPr lang="en-US" sz="1200" b="1" dirty="0">
                 <a:solidFill>
                   <a:srgbClr val="EAF0FF"/>
                 </a:solidFill>
@@ -4706,9 +5633,9 @@
                 <a:ea typeface="Calibri" pitchFamily="34" charset="-122"/>
                 <a:cs typeface="Calibri" pitchFamily="34" charset="-120"/>
               </a:rPr>
-              <a:t>Talks to  →  Roblox Studio</a:t>
-            </a:r>
-            <a:endParaRPr lang="en-US" sz="1250" dirty="0"/>
+              <a:t>Talks to  -&gt;  Roblox Studio</a:t>
+            </a:r>
+            <a:endParaRPr lang="en-US" sz="1200" dirty="0"/>
           </a:p>
         </p:txBody>
       </p:sp>
@@ -4720,12 +5647,12 @@
         </p:nvSpPr>
         <p:spPr>
           <a:xfrm>
-            <a:off x="6309360" y="1783080"/>
-            <a:ext cx="5212080" cy="2468880"/>
+            <a:off x="6309360" y="1737360"/>
+            <a:ext cx="5212080" cy="2286000"/>
           </a:xfrm>
           <a:prstGeom prst="roundRect">
             <a:avLst>
-              <a:gd name="adj" fmla="val 4444"/>
+              <a:gd name="adj" fmla="val 4800"/>
             </a:avLst>
           </a:prstGeom>
           <a:solidFill>
@@ -4754,7 +5681,7 @@
         </p:nvSpPr>
         <p:spPr>
           <a:xfrm>
-            <a:off x="6675120" y="2148840"/>
+            <a:off x="6675120" y="2103120"/>
             <a:ext cx="502920" cy="502920"/>
           </a:xfrm>
           <a:prstGeom prst="ellipse">
@@ -4774,7 +5701,7 @@
         </p:nvSpPr>
         <p:spPr>
           <a:xfrm>
-            <a:off x="7360920" y="2167128"/>
+            <a:off x="7360920" y="2121408"/>
             <a:ext cx="4023360" cy="502920"/>
           </a:xfrm>
           <a:prstGeom prst="rect">
@@ -4791,7 +5718,7 @@
               <a:buNone/>
             </a:pPr>
             <a:r>
-              <a:rPr lang="en-US" sz="2200" b="1" dirty="0">
+              <a:rPr lang="en-US" sz="2100" b="1" dirty="0">
                 <a:solidFill>
                   <a:srgbClr val="EAF0FF"/>
                 </a:solidFill>
@@ -4801,7 +5728,7 @@
               </a:rPr>
               <a:t>Git / GitHub</a:t>
             </a:r>
-            <a:endParaRPr lang="en-US" sz="2200" dirty="0"/>
+            <a:endParaRPr lang="en-US" sz="2100" dirty="0"/>
           </a:p>
         </p:txBody>
       </p:sp>
@@ -4813,8 +5740,8 @@
         </p:nvSpPr>
         <p:spPr>
           <a:xfrm>
-            <a:off x="6693408" y="2880360"/>
-            <a:ext cx="4480560" cy="868680"/>
+            <a:off x="6693408" y="2788920"/>
+            <a:ext cx="4480560" cy="777240"/>
           </a:xfrm>
           <a:prstGeom prst="rect">
             <a:avLst/>
@@ -4828,12 +5755,12 @@
           <a:p>
             <a:pPr indent="0" marL="0">
               <a:lnSpc>
-                <a:spcPct val="108000"/>
+                <a:spcPct val="105000"/>
               </a:lnSpc>
               <a:buNone/>
             </a:pPr>
             <a:r>
-              <a:rPr lang="en-US" sz="1400" dirty="0">
+              <a:rPr lang="en-US" sz="1350" dirty="0">
                 <a:solidFill>
                   <a:srgbClr val="9BB0D8"/>
                 </a:solidFill>
@@ -4841,9 +5768,9 @@
                 <a:ea typeface="Calibri" pitchFamily="34" charset="-122"/>
                 <a:cs typeface="Calibri" pitchFamily="34" charset="-120"/>
               </a:rPr>
-              <a:t>Version control for your text files — undo, branches, backup online. Handy, but Studio has no idea Git exists.</a:t>
-            </a:r>
-            <a:endParaRPr lang="en-US" sz="1400" dirty="0"/>
+              <a:t>Version control for your text files - undo, branches, backup online. Studio has no idea Git exists.</a:t>
+            </a:r>
+            <a:endParaRPr lang="en-US" sz="1350" dirty="0"/>
           </a:p>
         </p:txBody>
       </p:sp>
@@ -4855,12 +5782,12 @@
         </p:nvSpPr>
         <p:spPr>
           <a:xfrm>
-            <a:off x="6693408" y="3657600"/>
-            <a:ext cx="4443984" cy="411480"/>
+            <a:off x="6693408" y="3474720"/>
+            <a:ext cx="4443984" cy="384048"/>
           </a:xfrm>
           <a:prstGeom prst="roundRect">
             <a:avLst>
-              <a:gd name="adj" fmla="val 22222"/>
+              <a:gd name="adj" fmla="val 23810"/>
             </a:avLst>
           </a:prstGeom>
           <a:solidFill>
@@ -4882,8 +5809,8 @@
         </p:nvSpPr>
         <p:spPr>
           <a:xfrm>
-            <a:off x="6693408" y="3657600"/>
-            <a:ext cx="4443984" cy="411480"/>
+            <a:off x="6693408" y="3474720"/>
+            <a:ext cx="4443984" cy="384048"/>
           </a:xfrm>
           <a:prstGeom prst="rect">
             <a:avLst/>
@@ -4899,7 +5826,7 @@
               <a:buNone/>
             </a:pPr>
             <a:r>
-              <a:rPr lang="en-US" sz="1250" b="1" dirty="0">
+              <a:rPr lang="en-US" sz="1200" b="1" dirty="0">
                 <a:solidFill>
                   <a:srgbClr val="EAF0FF"/>
                 </a:solidFill>
@@ -4907,9 +5834,9 @@
                 <a:ea typeface="Calibri" pitchFamily="34" charset="-122"/>
                 <a:cs typeface="Calibri" pitchFamily="34" charset="-120"/>
               </a:rPr>
-              <a:t>Talks to  →  your files</a:t>
-            </a:r>
-            <a:endParaRPr lang="en-US" sz="1250" dirty="0"/>
+              <a:t>Talks to  -&gt;  your files</a:t>
+            </a:r>
+            <a:endParaRPr lang="en-US" sz="1200" dirty="0"/>
           </a:p>
         </p:txBody>
       </p:sp>
@@ -4921,20 +5848,20 @@
         </p:nvSpPr>
         <p:spPr>
           <a:xfrm>
-            <a:off x="640080" y="4572000"/>
-            <a:ext cx="10881360" cy="1508760"/>
+            <a:off x="640080" y="4297680"/>
+            <a:ext cx="10881360" cy="1783080"/>
           </a:xfrm>
           <a:prstGeom prst="roundRect">
             <a:avLst>
-              <a:gd name="adj" fmla="val 6061"/>
+              <a:gd name="adj" fmla="val 5128"/>
             </a:avLst>
           </a:prstGeom>
           <a:solidFill>
-            <a:srgbClr val="2A2310"/>
+            <a:srgbClr val="16103A"/>
           </a:solidFill>
           <a:ln w="19050">
             <a:solidFill>
-              <a:srgbClr val="FFD23F"/>
+              <a:srgbClr val="8A5BFF"/>
             </a:solidFill>
             <a:prstDash val="solid"/>
           </a:ln>
@@ -4948,8 +5875,8 @@
         </p:nvSpPr>
         <p:spPr>
           <a:xfrm>
-            <a:off x="914400" y="4709160"/>
-            <a:ext cx="10332720" cy="1280160"/>
+            <a:off x="914400" y="4434840"/>
+            <a:ext cx="10332720" cy="1508760"/>
           </a:xfrm>
           <a:prstGeom prst="rect">
             <a:avLst/>
@@ -4963,25 +5890,25 @@
           <a:p>
             <a:pPr indent="0" marL="0">
               <a:lnSpc>
-                <a:spcPct val="110000"/>
+                <a:spcPct val="112000"/>
               </a:lnSpc>
               <a:buNone/>
             </a:pPr>
             <a:r>
               <a:rPr lang="en-US" sz="1600" b="1" dirty="0">
                 <a:solidFill>
-                  <a:srgbClr val="FFD23F"/>
-                </a:solidFill>
-                <a:latin typeface="Calibri" pitchFamily="34" charset="0"/>
-                <a:ea typeface="Calibri" pitchFamily="34" charset="-122"/>
-                <a:cs typeface="Calibri" pitchFamily="34" charset="-120"/>
-              </a:rPr>
-              <a:t>“If I have Git, why doesn't Studio just read it?”
+                  <a:srgbClr val="C9B3FF"/>
+                </a:solidFill>
+                <a:latin typeface="Calibri" pitchFamily="34" charset="0"/>
+                <a:ea typeface="Calibri" pitchFamily="34" charset="-122"/>
+                <a:cs typeface="Calibri" pitchFamily="34" charset="-120"/>
+              </a:rPr>
+              <a:t>...and the MCP goes the OTHER way.
 </a:t>
             </a:r>
             <a:pPr indent="0" marL="0">
               <a:lnSpc>
-                <a:spcPct val="110000"/>
+                <a:spcPct val="112000"/>
               </a:lnSpc>
               <a:buNone/>
             </a:pPr>
@@ -4994,7 +5921,7 @@
                 <a:ea typeface="Calibri" pitchFamily="34" charset="-122"/>
                 <a:cs typeface="Calibri" pitchFamily="34" charset="-120"/>
               </a:rPr>
-              <a:t>Git only stores text files — Studio has no idea Git exists. Rojo is the bridge that pushes files in. Git runs alongside purely to save your work. Publishing is a separate, manual step in Studio.</a:t>
+              <a:t>Rojo pushes your files INTO Studio. The Roblox Studio MCP lets Cursor read the LIVE game back OUT - the parts, models, UI, and scripts already inside the .rbxl that Rojo can't see. Together, Cursor finally sees the whole picture.</a:t>
             </a:r>
             <a:endParaRPr lang="en-US" sz="1600" dirty="0"/>
           </a:p>
@@ -6118,7 +7045,7 @@
                 <a:ea typeface="Calibri" pitchFamily="34" charset="-122"/>
                 <a:cs typeface="Calibri" pitchFamily="34" charset="-120"/>
               </a:rPr>
-              <a:t>Verify the sync</a:t>
+              <a:t>Verify + enable MCP</a:t>
             </a:r>
             <a:endParaRPr lang="en-US" sz="1650" dirty="0"/>
           </a:p>
@@ -6160,7 +7087,7 @@
                 <a:ea typeface="Calibri" pitchFamily="34" charset="-122"/>
                 <a:cs typeface="Calibri" pitchFamily="34" charset="-120"/>
               </a:rPr>
-              <a:t>Open Explorer: your src/ files appear under mapped services. Add a print, save, test.</a:t>
+              <a:t>Check Explorer for your src/ files. Then enable the Studio MCP (next slides).</a:t>
             </a:r>
             <a:endParaRPr lang="en-US" sz="1200" dirty="0"/>
           </a:p>
@@ -6605,7 +7532,7 @@
                 <a:ea typeface="Calibri" pitchFamily="34" charset="-122"/>
                 <a:cs typeface="Calibri" pitchFamily="34" charset="-120"/>
               </a:rPr>
-              <a:t>Connect  ≠  sync</a:t>
+              <a:t>Connect  is not  sync</a:t>
             </a:r>
             <a:endParaRPr lang="en-US" sz="1900" dirty="0"/>
           </a:p>
@@ -6647,7 +7574,7 @@
                 <a:ea typeface="Calibri" pitchFamily="34" charset="-122"/>
                 <a:cs typeface="Calibri" pitchFamily="34" charset="-120"/>
               </a:rPr>
-              <a:t>Connecting only means Studio can talk to Rojo. Rojo only syncs files mapped in default.project.json — everything else is invisible.</a:t>
+              <a:t>Connecting only means Studio can talk to Rojo. Rojo only syncs files mapped in default.project.json - everything else is invisible.</a:t>
             </a:r>
             <a:endParaRPr lang="en-US" sz="1250" dirty="0"/>
           </a:p>
@@ -6767,7 +7694,7 @@
         <p:spPr>
           <a:xfrm>
             <a:off x="822960" y="4434840"/>
-            <a:ext cx="4206240" cy="457200"/>
+            <a:ext cx="4572000" cy="457200"/>
           </a:xfrm>
           <a:prstGeom prst="rect">
             <a:avLst/>
@@ -6805,8 +7732,8 @@
         </p:nvSpPr>
         <p:spPr>
           <a:xfrm>
-            <a:off x="5120640" y="4434840"/>
-            <a:ext cx="6217920" cy="457200"/>
+            <a:off x="5486400" y="4434840"/>
+            <a:ext cx="5852160" cy="457200"/>
           </a:xfrm>
           <a:prstGeom prst="rect">
             <a:avLst/>
@@ -6872,7 +7799,7 @@
         <p:spPr>
           <a:xfrm>
             <a:off x="822960" y="4946904"/>
-            <a:ext cx="4206240" cy="457200"/>
+            <a:ext cx="4572000" cy="457200"/>
           </a:xfrm>
           <a:prstGeom prst="rect">
             <a:avLst/>
@@ -6910,8 +7837,8 @@
         </p:nvSpPr>
         <p:spPr>
           <a:xfrm>
-            <a:off x="5120640" y="4946904"/>
-            <a:ext cx="6217920" cy="457200"/>
+            <a:off x="5486400" y="4946904"/>
+            <a:ext cx="5852160" cy="457200"/>
           </a:xfrm>
           <a:prstGeom prst="rect">
             <a:avLst/>
@@ -6977,7 +7904,7 @@
         <p:spPr>
           <a:xfrm>
             <a:off x="822960" y="5458968"/>
-            <a:ext cx="4206240" cy="457200"/>
+            <a:ext cx="4572000" cy="457200"/>
           </a:xfrm>
           <a:prstGeom prst="rect">
             <a:avLst/>
@@ -7015,8 +7942,8 @@
         </p:nvSpPr>
         <p:spPr>
           <a:xfrm>
-            <a:off x="5120640" y="5458968"/>
-            <a:ext cx="6217920" cy="457200"/>
+            <a:off x="5486400" y="5458968"/>
+            <a:ext cx="5852160" cy="457200"/>
           </a:xfrm>
           <a:prstGeom prst="rect">
             <a:avLst/>
@@ -7082,7 +8009,7 @@
         <p:spPr>
           <a:xfrm>
             <a:off x="822960" y="5971032"/>
-            <a:ext cx="4206240" cy="457200"/>
+            <a:ext cx="4572000" cy="457200"/>
           </a:xfrm>
           <a:prstGeom prst="rect">
             <a:avLst/>
@@ -7106,7 +8033,7 @@
                 <a:ea typeface="Calibri" pitchFamily="34" charset="-122"/>
                 <a:cs typeface="Calibri" pitchFamily="34" charset="-120"/>
               </a:rPr>
-              <a:t>Nothing updates on save</a:t>
+              <a:t>Cursor can't see Roblox_Studio MCP</a:t>
             </a:r>
             <a:endParaRPr lang="en-US" sz="1250" dirty="0"/>
           </a:p>
@@ -7120,8 +8047,8 @@
         </p:nvSpPr>
         <p:spPr>
           <a:xfrm>
-            <a:off x="5120640" y="5971032"/>
-            <a:ext cx="6217920" cy="457200"/>
+            <a:off x="5486400" y="5971032"/>
+            <a:ext cx="5852160" cy="457200"/>
           </a:xfrm>
           <a:prstGeom prst="rect">
             <a:avLst/>
@@ -7145,7 +8072,7 @@
                 <a:ea typeface="Calibri" pitchFamily="34" charset="-122"/>
                 <a:cs typeface="Calibri" pitchFamily="34" charset="-120"/>
               </a:rPr>
-              <a:t>Restart rojo serve, click Connect</a:t>
+              <a:t>Enable Studio MCP + connect Cursor, restart Cursor</a:t>
             </a:r>
             <a:endParaRPr lang="en-US" sz="1250" dirty="0"/>
           </a:p>
@@ -7384,7 +8311,7 @@
                 <a:ea typeface="Consolas" pitchFamily="34" charset="-122"/>
                 <a:cs typeface="Consolas" pitchFamily="34" charset="-120"/>
               </a:rPr>
-              <a:t>← src/server/Main.server.luau
+              <a:t>&lt; src/server/Main.server.luau
 </a:t>
             </a:r>
             <a:pPr indent="0" marL="0">
@@ -7419,7 +8346,7 @@
                 <a:ea typeface="Consolas" pitchFamily="34" charset="-122"/>
                 <a:cs typeface="Consolas" pitchFamily="34" charset="-120"/>
               </a:rPr>
-              <a:t>← src/server/CoinSpawner.server.luau
+              <a:t>&lt; src/server/CoinSpawner.server.luau
 </a:t>
             </a:r>
             <a:pPr indent="0" marL="0">
@@ -7490,7 +8417,7 @@
                 <a:ea typeface="Consolas" pitchFamily="34" charset="-122"/>
                 <a:cs typeface="Consolas" pitchFamily="34" charset="-120"/>
               </a:rPr>
-              <a:t>← src/shared/GameConfig.luau
+              <a:t>&lt; src/shared/GameConfig.luau
 </a:t>
             </a:r>
             <a:pPr indent="0" marL="0">
@@ -7579,7 +8506,7 @@
                 <a:ea typeface="Consolas" pitchFamily="34" charset="-122"/>
                 <a:cs typeface="Consolas" pitchFamily="34" charset="-120"/>
               </a:rPr>
-              <a:t>← src/client/Main.client.luau</a:t>
+              <a:t>&lt; src/client/Main.client.luau</a:t>
             </a:r>
             <a:endParaRPr lang="en-US" sz="1200" dirty="0"/>
           </a:p>
@@ -8124,7 +9051,7 @@
                 <a:ea typeface="Calibri" pitchFamily="34" charset="-122"/>
                 <a:cs typeface="Calibri" pitchFamily="34" charset="-120"/>
               </a:rPr>
-              <a:t>add print("Hello from Rojo") to Main.server.luau, save, press Play — see it in Output.</a:t>
+              <a:t>add print("Hello from Rojo") to Main.server.luau, save, press Play - see it in Output.</a:t>
             </a:r>
             <a:endParaRPr lang="en-US" sz="1200" dirty="0"/>
           </a:p>
@@ -8195,7 +9122,7 @@
                 <a:ea typeface="Calibri" pitchFamily="34" charset="-122"/>
                 <a:cs typeface="Calibri" pitchFamily="34" charset="-120"/>
               </a:rPr>
-              <a:t>EVERY CODING SESSION</a:t>
+              <a:t>BONUS SUPERPOWER</a:t>
             </a:r>
             <a:endParaRPr lang="en-US" sz="1300" dirty="0"/>
           </a:p>
@@ -8234,7 +9161,7 @@
                 <a:ea typeface="Calibri" pitchFamily="34" charset="-122"/>
                 <a:cs typeface="Calibri" pitchFamily="34" charset="-120"/>
               </a:rPr>
-              <a:t>The daily loop &amp; Git</a:t>
+              <a:t>What is an MCP?</a:t>
             </a:r>
             <a:endParaRPr lang="en-US" sz="3800" dirty="0"/>
           </a:p>
@@ -8242,18 +9169,77 @@
       </p:sp>
       <p:sp>
         <p:nvSpPr>
-          <p:cNvPr id="4" name="Shape 2"/>
-          <p:cNvSpPr/>
-          <p:nvPr/>
-        </p:nvSpPr>
-        <p:spPr>
-          <a:xfrm>
-            <a:off x="777240" y="1783080"/>
-            <a:ext cx="1874520" cy="868680"/>
+          <p:cNvPr id="4" name="Text 2"/>
+          <p:cNvSpPr/>
+          <p:nvPr/>
+        </p:nvSpPr>
+        <p:spPr>
+          <a:xfrm>
+            <a:off x="640080" y="1737360"/>
+            <a:ext cx="10881360" cy="685800"/>
+          </a:xfrm>
+          <a:prstGeom prst="rect">
+            <a:avLst/>
+          </a:prstGeom>
+          <a:noFill/>
+          <a:ln/>
+        </p:spPr>
+        <p:txBody>
+          <a:bodyPr wrap="square" lIns="0" tIns="0" rIns="0" bIns="0" rtlCol="0" anchor="ctr"/>
+          <a:lstStyle/>
+          <a:p>
+            <a:pPr indent="0" marL="0">
+              <a:lnSpc>
+                <a:spcPct val="110000"/>
+              </a:lnSpc>
+              <a:buNone/>
+            </a:pPr>
+            <a:r>
+              <a:rPr lang="en-US" sz="1450" b="1" dirty="0">
+                <a:solidFill>
+                  <a:srgbClr val="C9B3FF"/>
+                </a:solidFill>
+                <a:latin typeface="Calibri" pitchFamily="34" charset="0"/>
+                <a:ea typeface="Calibri" pitchFamily="34" charset="-122"/>
+                <a:cs typeface="Calibri" pitchFamily="34" charset="-120"/>
+              </a:rPr>
+              <a:t>MCP = a walkie-talkie between your AI and an app.  </a:t>
+            </a:r>
+            <a:pPr indent="0" marL="0">
+              <a:lnSpc>
+                <a:spcPct val="110000"/>
+              </a:lnSpc>
+              <a:buNone/>
+            </a:pPr>
+            <a:r>
+              <a:rPr lang="en-US" sz="1450" dirty="0">
+                <a:solidFill>
+                  <a:srgbClr val="EAF0FF"/>
+                </a:solidFill>
+                <a:latin typeface="Calibri" pitchFamily="34" charset="0"/>
+                <a:ea typeface="Calibri" pitchFamily="34" charset="-122"/>
+                <a:cs typeface="Calibri" pitchFamily="34" charset="-120"/>
+              </a:rPr>
+              <a:t>The Roblox Studio MCP lets Cursor look inside your OPEN game - every part, folder, and script - and read (or change) it, no copy-paste.</a:t>
+            </a:r>
+            <a:endParaRPr lang="en-US" sz="1450" dirty="0"/>
+          </a:p>
+        </p:txBody>
+      </p:sp>
+      <p:sp>
+        <p:nvSpPr>
+          <p:cNvPr id="5" name="Shape 3"/>
+          <p:cNvSpPr/>
+          <p:nvPr/>
+        </p:nvSpPr>
+        <p:spPr>
+          <a:xfrm>
+            <a:off x="640080" y="2606040"/>
+            <a:ext cx="5212080" cy="2286000"/>
           </a:xfrm>
           <a:prstGeom prst="roundRect">
             <a:avLst>
-              <a:gd name="adj" fmla="val 12632"/>
+              <a:gd name="adj" fmla="val 4800"/>
             </a:avLst>
           </a:prstGeom>
           <a:solidFill>
@@ -8276,50 +9262,50 @@
       </p:sp>
       <p:sp>
         <p:nvSpPr>
-          <p:cNvPr id="5" name="Shape 3"/>
-          <p:cNvSpPr/>
-          <p:nvPr/>
-        </p:nvSpPr>
-        <p:spPr>
-          <a:xfrm>
-            <a:off x="978408" y="2130552"/>
-            <a:ext cx="182880" cy="182880"/>
+          <p:cNvPr id="6" name="Shape 4"/>
+          <p:cNvSpPr/>
+          <p:nvPr/>
+        </p:nvSpPr>
+        <p:spPr>
+          <a:xfrm>
+            <a:off x="1005840" y="2971800"/>
+            <a:ext cx="502920" cy="502920"/>
           </a:xfrm>
           <a:prstGeom prst="ellipse">
             <a:avLst/>
           </a:prstGeom>
           <a:solidFill>
-            <a:srgbClr val="8A5BFF"/>
-          </a:solidFill>
-          <a:ln/>
-        </p:spPr>
-      </p:sp>
-      <p:sp>
-        <p:nvSpPr>
-          <p:cNvPr id="6" name="Text 4"/>
-          <p:cNvSpPr/>
-          <p:nvPr/>
-        </p:nvSpPr>
-        <p:spPr>
-          <a:xfrm>
-            <a:off x="1188720" y="1783080"/>
-            <a:ext cx="1371600" cy="868680"/>
-          </a:xfrm>
-          <a:prstGeom prst="rect">
-            <a:avLst/>
-          </a:prstGeom>
-          <a:noFill/>
-          <a:ln/>
-        </p:spPr>
-        <p:txBody>
-          <a:bodyPr wrap="square" lIns="0" tIns="0" rIns="0" bIns="0" rtlCol="0" anchor="ctr"/>
-          <a:lstStyle/>
-          <a:p>
-            <a:pPr indent="0" marL="0">
-              <a:buNone/>
-            </a:pPr>
-            <a:r>
-              <a:rPr lang="en-US" sz="1300" b="1" dirty="0">
+            <a:srgbClr val="00E5FF"/>
+          </a:solidFill>
+          <a:ln/>
+        </p:spPr>
+      </p:sp>
+      <p:sp>
+        <p:nvSpPr>
+          <p:cNvPr id="7" name="Text 5"/>
+          <p:cNvSpPr/>
+          <p:nvPr/>
+        </p:nvSpPr>
+        <p:spPr>
+          <a:xfrm>
+            <a:off x="1691640" y="2990088"/>
+            <a:ext cx="4023360" cy="502920"/>
+          </a:xfrm>
+          <a:prstGeom prst="rect">
+            <a:avLst/>
+          </a:prstGeom>
+          <a:noFill/>
+          <a:ln/>
+        </p:spPr>
+        <p:txBody>
+          <a:bodyPr wrap="square" lIns="0" tIns="0" rIns="0" bIns="0" rtlCol="0" anchor="ctr"/>
+          <a:lstStyle/>
+          <a:p>
+            <a:pPr indent="0" marL="0">
+              <a:buNone/>
+            </a:pPr>
+            <a:r>
+              <a:rPr lang="en-US" sz="2100" b="1" dirty="0">
                 <a:solidFill>
                   <a:srgbClr val="EAF0FF"/>
                 </a:solidFill>
@@ -8327,50 +9313,134 @@
                 <a:ea typeface="Calibri" pitchFamily="34" charset="-122"/>
                 <a:cs typeface="Calibri" pitchFamily="34" charset="-120"/>
               </a:rPr>
-              <a:t>Code in Cursor</a:t>
-            </a:r>
-            <a:endParaRPr lang="en-US" sz="1300" dirty="0"/>
-          </a:p>
-        </p:txBody>
-      </p:sp>
-      <p:sp>
-        <p:nvSpPr>
-          <p:cNvPr id="7" name="Shape 5"/>
-          <p:cNvSpPr/>
-          <p:nvPr/>
-        </p:nvSpPr>
-        <p:spPr>
-          <a:xfrm>
-            <a:off x="2670048" y="2221992"/>
-            <a:ext cx="256032" cy="0"/>
-          </a:xfrm>
-          <a:prstGeom prst="line">
-            <a:avLst/>
-          </a:prstGeom>
-          <a:noFill/>
-          <a:ln w="38100">
+              <a:t>Rojo</a:t>
+            </a:r>
+            <a:endParaRPr lang="en-US" sz="2100" dirty="0"/>
+          </a:p>
+        </p:txBody>
+      </p:sp>
+      <p:sp>
+        <p:nvSpPr>
+          <p:cNvPr id="8" name="Text 6"/>
+          <p:cNvSpPr/>
+          <p:nvPr/>
+        </p:nvSpPr>
+        <p:spPr>
+          <a:xfrm>
+            <a:off x="1024128" y="3657600"/>
+            <a:ext cx="4480560" cy="777240"/>
+          </a:xfrm>
+          <a:prstGeom prst="rect">
+            <a:avLst/>
+          </a:prstGeom>
+          <a:noFill/>
+          <a:ln/>
+        </p:spPr>
+        <p:txBody>
+          <a:bodyPr wrap="square" lIns="0" tIns="0" rIns="0" bIns="0" rtlCol="0" anchor="ctr"/>
+          <a:lstStyle/>
+          <a:p>
+            <a:pPr indent="0" marL="0">
+              <a:lnSpc>
+                <a:spcPct val="105000"/>
+              </a:lnSpc>
+              <a:buNone/>
+            </a:pPr>
+            <a:r>
+              <a:rPr lang="en-US" sz="1350" dirty="0">
+                <a:solidFill>
+                  <a:srgbClr val="9BB0D8"/>
+                </a:solidFill>
+                <a:latin typeface="Calibri" pitchFamily="34" charset="0"/>
+                <a:ea typeface="Calibri" pitchFamily="34" charset="-122"/>
+                <a:cs typeface="Calibri" pitchFamily="34" charset="-120"/>
+              </a:rPr>
+              <a:t>Pushes your code files INTO Studio. One direction: your .luau files land in Studio's Explorer.</a:t>
+            </a:r>
+            <a:endParaRPr lang="en-US" sz="1350" dirty="0"/>
+          </a:p>
+        </p:txBody>
+      </p:sp>
+      <p:sp>
+        <p:nvSpPr>
+          <p:cNvPr id="9" name="Shape 7"/>
+          <p:cNvSpPr/>
+          <p:nvPr/>
+        </p:nvSpPr>
+        <p:spPr>
+          <a:xfrm>
+            <a:off x="1024128" y="4343400"/>
+            <a:ext cx="4443984" cy="384048"/>
+          </a:xfrm>
+          <a:prstGeom prst="roundRect">
+            <a:avLst>
+              <a:gd name="adj" fmla="val 23810"/>
+            </a:avLst>
+          </a:prstGeom>
+          <a:solidFill>
+            <a:srgbClr val="1B265A"/>
+          </a:solidFill>
+          <a:ln w="12700">
             <a:solidFill>
-              <a:srgbClr val="FF3DB0"/>
+              <a:srgbClr val="00E5FF"/>
             </a:solidFill>
             <a:prstDash val="solid"/>
-            <a:tailEnd type="triangle"/>
           </a:ln>
         </p:spPr>
       </p:sp>
       <p:sp>
         <p:nvSpPr>
-          <p:cNvPr id="8" name="Shape 6"/>
-          <p:cNvSpPr/>
-          <p:nvPr/>
-        </p:nvSpPr>
-        <p:spPr>
-          <a:xfrm>
-            <a:off x="2944368" y="1783080"/>
-            <a:ext cx="1874520" cy="868680"/>
+          <p:cNvPr id="10" name="Text 8"/>
+          <p:cNvSpPr/>
+          <p:nvPr/>
+        </p:nvSpPr>
+        <p:spPr>
+          <a:xfrm>
+            <a:off x="1024128" y="4343400"/>
+            <a:ext cx="4443984" cy="384048"/>
+          </a:xfrm>
+          <a:prstGeom prst="rect">
+            <a:avLst/>
+          </a:prstGeom>
+          <a:noFill/>
+          <a:ln/>
+        </p:spPr>
+        <p:txBody>
+          <a:bodyPr wrap="square" lIns="0" tIns="0" rIns="0" bIns="0" rtlCol="0" anchor="ctr"/>
+          <a:lstStyle/>
+          <a:p>
+            <a:pPr algn="ctr" indent="0" marL="0">
+              <a:buNone/>
+            </a:pPr>
+            <a:r>
+              <a:rPr lang="en-US" sz="1200" b="1" dirty="0">
+                <a:solidFill>
+                  <a:srgbClr val="EAF0FF"/>
+                </a:solidFill>
+                <a:latin typeface="Calibri" pitchFamily="34" charset="0"/>
+                <a:ea typeface="Calibri" pitchFamily="34" charset="-122"/>
+                <a:cs typeface="Calibri" pitchFamily="34" charset="-120"/>
+              </a:rPr>
+              <a:t>your files  -&gt;  Studio</a:t>
+            </a:r>
+            <a:endParaRPr lang="en-US" sz="1200" dirty="0"/>
+          </a:p>
+        </p:txBody>
+      </p:sp>
+      <p:sp>
+        <p:nvSpPr>
+          <p:cNvPr id="11" name="Shape 9"/>
+          <p:cNvSpPr/>
+          <p:nvPr/>
+        </p:nvSpPr>
+        <p:spPr>
+          <a:xfrm>
+            <a:off x="6309360" y="2606040"/>
+            <a:ext cx="5212080" cy="2286000"/>
           </a:xfrm>
           <a:prstGeom prst="roundRect">
             <a:avLst>
-              <a:gd name="adj" fmla="val 12632"/>
+              <a:gd name="adj" fmla="val 4800"/>
             </a:avLst>
           </a:prstGeom>
           <a:solidFill>
@@ -8393,50 +9463,50 @@
       </p:sp>
       <p:sp>
         <p:nvSpPr>
-          <p:cNvPr id="9" name="Shape 7"/>
-          <p:cNvSpPr/>
-          <p:nvPr/>
-        </p:nvSpPr>
-        <p:spPr>
-          <a:xfrm>
-            <a:off x="3145536" y="2130552"/>
-            <a:ext cx="182880" cy="182880"/>
+          <p:cNvPr id="12" name="Shape 10"/>
+          <p:cNvSpPr/>
+          <p:nvPr/>
+        </p:nvSpPr>
+        <p:spPr>
+          <a:xfrm>
+            <a:off x="6675120" y="2971800"/>
+            <a:ext cx="502920" cy="502920"/>
           </a:xfrm>
           <a:prstGeom prst="ellipse">
             <a:avLst/>
           </a:prstGeom>
           <a:solidFill>
-            <a:srgbClr val="00E5FF"/>
-          </a:solidFill>
-          <a:ln/>
-        </p:spPr>
-      </p:sp>
-      <p:sp>
-        <p:nvSpPr>
-          <p:cNvPr id="10" name="Text 8"/>
-          <p:cNvSpPr/>
-          <p:nvPr/>
-        </p:nvSpPr>
-        <p:spPr>
-          <a:xfrm>
-            <a:off x="3355848" y="1783080"/>
-            <a:ext cx="1371600" cy="868680"/>
-          </a:xfrm>
-          <a:prstGeom prst="rect">
-            <a:avLst/>
-          </a:prstGeom>
-          <a:noFill/>
-          <a:ln/>
-        </p:spPr>
-        <p:txBody>
-          <a:bodyPr wrap="square" lIns="0" tIns="0" rIns="0" bIns="0" rtlCol="0" anchor="ctr"/>
-          <a:lstStyle/>
-          <a:p>
-            <a:pPr indent="0" marL="0">
-              <a:buNone/>
-            </a:pPr>
-            <a:r>
-              <a:rPr lang="en-US" sz="1300" b="1" dirty="0">
+            <a:srgbClr val="8A5BFF"/>
+          </a:solidFill>
+          <a:ln/>
+        </p:spPr>
+      </p:sp>
+      <p:sp>
+        <p:nvSpPr>
+          <p:cNvPr id="13" name="Text 11"/>
+          <p:cNvSpPr/>
+          <p:nvPr/>
+        </p:nvSpPr>
+        <p:spPr>
+          <a:xfrm>
+            <a:off x="7360920" y="2990088"/>
+            <a:ext cx="4023360" cy="502920"/>
+          </a:xfrm>
+          <a:prstGeom prst="rect">
+            <a:avLst/>
+          </a:prstGeom>
+          <a:noFill/>
+          <a:ln/>
+        </p:spPr>
+        <p:txBody>
+          <a:bodyPr wrap="square" lIns="0" tIns="0" rIns="0" bIns="0" rtlCol="0" anchor="ctr"/>
+          <a:lstStyle/>
+          <a:p>
+            <a:pPr indent="0" marL="0">
+              <a:buNone/>
+            </a:pPr>
+            <a:r>
+              <a:rPr lang="en-US" sz="2100" b="1" dirty="0">
                 <a:solidFill>
                   <a:srgbClr val="EAF0FF"/>
                 </a:solidFill>
@@ -8444,116 +9514,107 @@
                 <a:ea typeface="Calibri" pitchFamily="34" charset="-122"/>
                 <a:cs typeface="Calibri" pitchFamily="34" charset="-120"/>
               </a:rPr>
-              <a:t>Save</a:t>
-            </a:r>
-            <a:endParaRPr lang="en-US" sz="1300" dirty="0"/>
-          </a:p>
-        </p:txBody>
-      </p:sp>
-      <p:sp>
-        <p:nvSpPr>
-          <p:cNvPr id="11" name="Shape 9"/>
-          <p:cNvSpPr/>
-          <p:nvPr/>
-        </p:nvSpPr>
-        <p:spPr>
-          <a:xfrm>
-            <a:off x="4837176" y="2221992"/>
-            <a:ext cx="256032" cy="0"/>
-          </a:xfrm>
-          <a:prstGeom prst="line">
-            <a:avLst/>
-          </a:prstGeom>
-          <a:noFill/>
-          <a:ln w="38100">
-            <a:solidFill>
-              <a:srgbClr val="FF3DB0"/>
-            </a:solidFill>
-            <a:prstDash val="solid"/>
-            <a:tailEnd type="triangle"/>
-          </a:ln>
-        </p:spPr>
-      </p:sp>
-      <p:sp>
-        <p:nvSpPr>
-          <p:cNvPr id="12" name="Shape 10"/>
-          <p:cNvSpPr/>
-          <p:nvPr/>
-        </p:nvSpPr>
-        <p:spPr>
-          <a:xfrm>
-            <a:off x="5111496" y="1783080"/>
-            <a:ext cx="1874520" cy="868680"/>
+              <a:t>Roblox Studio MCP</a:t>
+            </a:r>
+            <a:endParaRPr lang="en-US" sz="2100" dirty="0"/>
+          </a:p>
+        </p:txBody>
+      </p:sp>
+      <p:sp>
+        <p:nvSpPr>
+          <p:cNvPr id="14" name="Text 12"/>
+          <p:cNvSpPr/>
+          <p:nvPr/>
+        </p:nvSpPr>
+        <p:spPr>
+          <a:xfrm>
+            <a:off x="6693408" y="3657600"/>
+            <a:ext cx="4480560" cy="777240"/>
+          </a:xfrm>
+          <a:prstGeom prst="rect">
+            <a:avLst/>
+          </a:prstGeom>
+          <a:noFill/>
+          <a:ln/>
+        </p:spPr>
+        <p:txBody>
+          <a:bodyPr wrap="square" lIns="0" tIns="0" rIns="0" bIns="0" rtlCol="0" anchor="ctr"/>
+          <a:lstStyle/>
+          <a:p>
+            <a:pPr indent="0" marL="0">
+              <a:lnSpc>
+                <a:spcPct val="105000"/>
+              </a:lnSpc>
+              <a:buNone/>
+            </a:pPr>
+            <a:r>
+              <a:rPr lang="en-US" sz="1350" dirty="0">
+                <a:solidFill>
+                  <a:srgbClr val="9BB0D8"/>
+                </a:solidFill>
+                <a:latin typeface="Calibri" pitchFamily="34" charset="0"/>
+                <a:ea typeface="Calibri" pitchFamily="34" charset="-122"/>
+                <a:cs typeface="Calibri" pitchFamily="34" charset="-120"/>
+              </a:rPr>
+              <a:t>Lets Cursor read the whole LIVE game back out - parts, models, UI, and scripts made inside Studio.</a:t>
+            </a:r>
+            <a:endParaRPr lang="en-US" sz="1350" dirty="0"/>
+          </a:p>
+        </p:txBody>
+      </p:sp>
+      <p:sp>
+        <p:nvSpPr>
+          <p:cNvPr id="15" name="Shape 13"/>
+          <p:cNvSpPr/>
+          <p:nvPr/>
+        </p:nvSpPr>
+        <p:spPr>
+          <a:xfrm>
+            <a:off x="6693408" y="4343400"/>
+            <a:ext cx="4443984" cy="384048"/>
           </a:xfrm>
           <a:prstGeom prst="roundRect">
             <a:avLst>
-              <a:gd name="adj" fmla="val 12632"/>
+              <a:gd name="adj" fmla="val 23810"/>
             </a:avLst>
           </a:prstGeom>
           <a:solidFill>
-            <a:srgbClr val="151E47"/>
+            <a:srgbClr val="1B265A"/>
           </a:solidFill>
           <a:ln w="12700">
             <a:solidFill>
-              <a:srgbClr val="2A3870"/>
+              <a:srgbClr val="8A5BFF"/>
             </a:solidFill>
             <a:prstDash val="solid"/>
           </a:ln>
-          <a:effectLst>
-            <a:outerShdw sx="100000" sy="100000" kx="0" ky="0" algn="bl" rotWithShape="0" blurRad="114300" dist="38100" dir="5400000">
-              <a:srgbClr val="000000">
-                <a:alpha val="35000"/>
-              </a:srgbClr>
-            </a:outerShdw>
-          </a:effectLst>
-        </p:spPr>
-      </p:sp>
-      <p:sp>
-        <p:nvSpPr>
-          <p:cNvPr id="13" name="Shape 11"/>
-          <p:cNvSpPr/>
-          <p:nvPr/>
-        </p:nvSpPr>
-        <p:spPr>
-          <a:xfrm>
-            <a:off x="5312664" y="2130552"/>
-            <a:ext cx="182880" cy="182880"/>
-          </a:xfrm>
-          <a:prstGeom prst="ellipse">
-            <a:avLst/>
-          </a:prstGeom>
-          <a:solidFill>
-            <a:srgbClr val="FF3DB0"/>
-          </a:solidFill>
-          <a:ln/>
-        </p:spPr>
-      </p:sp>
-      <p:sp>
-        <p:nvSpPr>
-          <p:cNvPr id="14" name="Text 12"/>
-          <p:cNvSpPr/>
-          <p:nvPr/>
-        </p:nvSpPr>
-        <p:spPr>
-          <a:xfrm>
-            <a:off x="5522976" y="1783080"/>
-            <a:ext cx="1371600" cy="868680"/>
-          </a:xfrm>
-          <a:prstGeom prst="rect">
-            <a:avLst/>
-          </a:prstGeom>
-          <a:noFill/>
-          <a:ln/>
-        </p:spPr>
-        <p:txBody>
-          <a:bodyPr wrap="square" lIns="0" tIns="0" rIns="0" bIns="0" rtlCol="0" anchor="ctr"/>
-          <a:lstStyle/>
-          <a:p>
-            <a:pPr indent="0" marL="0">
-              <a:buNone/>
-            </a:pPr>
-            <a:r>
-              <a:rPr lang="en-US" sz="1300" b="1" dirty="0">
+        </p:spPr>
+      </p:sp>
+      <p:sp>
+        <p:nvSpPr>
+          <p:cNvPr id="16" name="Text 14"/>
+          <p:cNvSpPr/>
+          <p:nvPr/>
+        </p:nvSpPr>
+        <p:spPr>
+          <a:xfrm>
+            <a:off x="6693408" y="4343400"/>
+            <a:ext cx="4443984" cy="384048"/>
+          </a:xfrm>
+          <a:prstGeom prst="rect">
+            <a:avLst/>
+          </a:prstGeom>
+          <a:noFill/>
+          <a:ln/>
+        </p:spPr>
+        <p:txBody>
+          <a:bodyPr wrap="square" lIns="0" tIns="0" rIns="0" bIns="0" rtlCol="0" anchor="ctr"/>
+          <a:lstStyle/>
+          <a:p>
+            <a:pPr algn="ctr" indent="0" marL="0">
+              <a:buNone/>
+            </a:pPr>
+            <a:r>
+              <a:rPr lang="en-US" sz="1200" b="1" dirty="0">
                 <a:solidFill>
                   <a:srgbClr val="EAF0FF"/>
                 </a:solidFill>
@@ -8561,88 +9622,37 @@
                 <a:ea typeface="Calibri" pitchFamily="34" charset="-122"/>
                 <a:cs typeface="Calibri" pitchFamily="34" charset="-120"/>
               </a:rPr>
-              <a:t>Test in Studio</a:t>
-            </a:r>
-            <a:endParaRPr lang="en-US" sz="1300" dirty="0"/>
-          </a:p>
-        </p:txBody>
-      </p:sp>
-      <p:sp>
-        <p:nvSpPr>
-          <p:cNvPr id="15" name="Shape 13"/>
-          <p:cNvSpPr/>
-          <p:nvPr/>
-        </p:nvSpPr>
-        <p:spPr>
-          <a:xfrm>
-            <a:off x="7004304" y="2221992"/>
-            <a:ext cx="256032" cy="0"/>
-          </a:xfrm>
-          <a:prstGeom prst="line">
-            <a:avLst/>
-          </a:prstGeom>
-          <a:noFill/>
-          <a:ln w="38100">
-            <a:solidFill>
-              <a:srgbClr val="FF3DB0"/>
-            </a:solidFill>
-            <a:prstDash val="solid"/>
-            <a:tailEnd type="triangle"/>
-          </a:ln>
-        </p:spPr>
-      </p:sp>
-      <p:sp>
-        <p:nvSpPr>
-          <p:cNvPr id="16" name="Shape 14"/>
-          <p:cNvSpPr/>
-          <p:nvPr/>
-        </p:nvSpPr>
-        <p:spPr>
-          <a:xfrm>
-            <a:off x="7278624" y="1783080"/>
-            <a:ext cx="1874520" cy="868680"/>
+              <a:t>Studio  -&gt;  Cursor</a:t>
+            </a:r>
+            <a:endParaRPr lang="en-US" sz="1200" dirty="0"/>
+          </a:p>
+        </p:txBody>
+      </p:sp>
+      <p:sp>
+        <p:nvSpPr>
+          <p:cNvPr id="17" name="Shape 15"/>
+          <p:cNvSpPr/>
+          <p:nvPr/>
+        </p:nvSpPr>
+        <p:spPr>
+          <a:xfrm>
+            <a:off x="640080" y="5166360"/>
+            <a:ext cx="10881360" cy="914400"/>
           </a:xfrm>
           <a:prstGeom prst="roundRect">
             <a:avLst>
-              <a:gd name="adj" fmla="val 12632"/>
+              <a:gd name="adj" fmla="val 10000"/>
             </a:avLst>
           </a:prstGeom>
           <a:solidFill>
-            <a:srgbClr val="151E47"/>
-          </a:solidFill>
-          <a:ln w="12700">
+            <a:srgbClr val="16103A"/>
+          </a:solidFill>
+          <a:ln w="15240">
             <a:solidFill>
-              <a:srgbClr val="2A3870"/>
+              <a:srgbClr val="8A5BFF"/>
             </a:solidFill>
             <a:prstDash val="solid"/>
           </a:ln>
-          <a:effectLst>
-            <a:outerShdw sx="100000" sy="100000" kx="0" ky="0" algn="bl" rotWithShape="0" blurRad="114300" dist="38100" dir="5400000">
-              <a:srgbClr val="000000">
-                <a:alpha val="35000"/>
-              </a:srgbClr>
-            </a:outerShdw>
-          </a:effectLst>
-        </p:spPr>
-      </p:sp>
-      <p:sp>
-        <p:nvSpPr>
-          <p:cNvPr id="17" name="Shape 15"/>
-          <p:cNvSpPr/>
-          <p:nvPr/>
-        </p:nvSpPr>
-        <p:spPr>
-          <a:xfrm>
-            <a:off x="7479792" y="2130552"/>
-            <a:ext cx="182880" cy="182880"/>
-          </a:xfrm>
-          <a:prstGeom prst="ellipse">
-            <a:avLst/>
-          </a:prstGeom>
-          <a:solidFill>
-            <a:srgbClr val="FFD23F"/>
-          </a:solidFill>
-          <a:ln/>
         </p:spPr>
       </p:sp>
       <p:sp>
@@ -8653,24 +9663,44 @@
         </p:nvSpPr>
         <p:spPr>
           <a:xfrm>
-            <a:off x="7690104" y="1783080"/>
-            <a:ext cx="1371600" cy="868680"/>
-          </a:xfrm>
-          <a:prstGeom prst="rect">
-            <a:avLst/>
-          </a:prstGeom>
-          <a:noFill/>
-          <a:ln/>
-        </p:spPr>
-        <p:txBody>
-          <a:bodyPr wrap="square" lIns="0" tIns="0" rIns="0" bIns="0" rtlCol="0" anchor="ctr"/>
-          <a:lstStyle/>
-          <a:p>
-            <a:pPr indent="0" marL="0">
-              <a:buNone/>
-            </a:pPr>
-            <a:r>
-              <a:rPr lang="en-US" sz="1300" b="1" dirty="0">
+            <a:off x="914400" y="5230368"/>
+            <a:ext cx="10332720" cy="786384"/>
+          </a:xfrm>
+          <a:prstGeom prst="rect">
+            <a:avLst/>
+          </a:prstGeom>
+          <a:noFill/>
+          <a:ln/>
+        </p:spPr>
+        <p:txBody>
+          <a:bodyPr wrap="square" lIns="0" tIns="0" rIns="0" bIns="0" rtlCol="0" anchor="ctr"/>
+          <a:lstStyle/>
+          <a:p>
+            <a:pPr indent="0" marL="0">
+              <a:lnSpc>
+                <a:spcPct val="108000"/>
+              </a:lnSpc>
+              <a:buNone/>
+            </a:pPr>
+            <a:r>
+              <a:rPr lang="en-US" sz="1250" b="1" dirty="0">
+                <a:solidFill>
+                  <a:srgbClr val="C9B3FF"/>
+                </a:solidFill>
+                <a:latin typeface="Calibri" pitchFamily="34" charset="0"/>
+                <a:ea typeface="Calibri" pitchFamily="34" charset="-122"/>
+                <a:cs typeface="Calibri" pitchFamily="34" charset="-120"/>
+              </a:rPr>
+              <a:t>Turn it on:  </a:t>
+            </a:r>
+            <a:pPr indent="0" marL="0">
+              <a:lnSpc>
+                <a:spcPct val="108000"/>
+              </a:lnSpc>
+              <a:buNone/>
+            </a:pPr>
+            <a:r>
+              <a:rPr lang="en-US" sz="1250" dirty="0">
                 <a:solidFill>
                   <a:srgbClr val="EAF0FF"/>
                 </a:solidFill>
@@ -8678,463 +9708,7 @@
                 <a:ea typeface="Calibri" pitchFamily="34" charset="-122"/>
                 <a:cs typeface="Calibri" pitchFamily="34" charset="-120"/>
               </a:rPr>
-              <a:t>git commit</a:t>
-            </a:r>
-            <a:endParaRPr lang="en-US" sz="1300" dirty="0"/>
-          </a:p>
-        </p:txBody>
-      </p:sp>
-      <p:sp>
-        <p:nvSpPr>
-          <p:cNvPr id="19" name="Shape 17"/>
-          <p:cNvSpPr/>
-          <p:nvPr/>
-        </p:nvSpPr>
-        <p:spPr>
-          <a:xfrm>
-            <a:off x="9171432" y="2221992"/>
-            <a:ext cx="256032" cy="0"/>
-          </a:xfrm>
-          <a:prstGeom prst="line">
-            <a:avLst/>
-          </a:prstGeom>
-          <a:noFill/>
-          <a:ln w="38100">
-            <a:solidFill>
-              <a:srgbClr val="FF3DB0"/>
-            </a:solidFill>
-            <a:prstDash val="solid"/>
-            <a:tailEnd type="triangle"/>
-          </a:ln>
-        </p:spPr>
-      </p:sp>
-      <p:sp>
-        <p:nvSpPr>
-          <p:cNvPr id="20" name="Shape 18"/>
-          <p:cNvSpPr/>
-          <p:nvPr/>
-        </p:nvSpPr>
-        <p:spPr>
-          <a:xfrm>
-            <a:off x="9445752" y="1783080"/>
-            <a:ext cx="1874520" cy="868680"/>
-          </a:xfrm>
-          <a:prstGeom prst="roundRect">
-            <a:avLst>
-              <a:gd name="adj" fmla="val 12632"/>
-            </a:avLst>
-          </a:prstGeom>
-          <a:solidFill>
-            <a:srgbClr val="151E47"/>
-          </a:solidFill>
-          <a:ln w="12700">
-            <a:solidFill>
-              <a:srgbClr val="2A3870"/>
-            </a:solidFill>
-            <a:prstDash val="solid"/>
-          </a:ln>
-          <a:effectLst>
-            <a:outerShdw sx="100000" sy="100000" kx="0" ky="0" algn="bl" rotWithShape="0" blurRad="114300" dist="38100" dir="5400000">
-              <a:srgbClr val="000000">
-                <a:alpha val="35000"/>
-              </a:srgbClr>
-            </a:outerShdw>
-          </a:effectLst>
-        </p:spPr>
-      </p:sp>
-      <p:sp>
-        <p:nvSpPr>
-          <p:cNvPr id="21" name="Shape 19"/>
-          <p:cNvSpPr/>
-          <p:nvPr/>
-        </p:nvSpPr>
-        <p:spPr>
-          <a:xfrm>
-            <a:off x="9646920" y="2130552"/>
-            <a:ext cx="182880" cy="182880"/>
-          </a:xfrm>
-          <a:prstGeom prst="ellipse">
-            <a:avLst/>
-          </a:prstGeom>
-          <a:solidFill>
-            <a:srgbClr val="23F0A0"/>
-          </a:solidFill>
-          <a:ln/>
-        </p:spPr>
-      </p:sp>
-      <p:sp>
-        <p:nvSpPr>
-          <p:cNvPr id="22" name="Text 20"/>
-          <p:cNvSpPr/>
-          <p:nvPr/>
-        </p:nvSpPr>
-        <p:spPr>
-          <a:xfrm>
-            <a:off x="9857232" y="1783080"/>
-            <a:ext cx="1371600" cy="868680"/>
-          </a:xfrm>
-          <a:prstGeom prst="rect">
-            <a:avLst/>
-          </a:prstGeom>
-          <a:noFill/>
-          <a:ln/>
-        </p:spPr>
-        <p:txBody>
-          <a:bodyPr wrap="square" lIns="0" tIns="0" rIns="0" bIns="0" rtlCol="0" anchor="ctr"/>
-          <a:lstStyle/>
-          <a:p>
-            <a:pPr indent="0" marL="0">
-              <a:buNone/>
-            </a:pPr>
-            <a:r>
-              <a:rPr lang="en-US" sz="1300" b="1" dirty="0">
-                <a:solidFill>
-                  <a:srgbClr val="EAF0FF"/>
-                </a:solidFill>
-                <a:latin typeface="Calibri" pitchFamily="34" charset="0"/>
-                <a:ea typeface="Calibri" pitchFamily="34" charset="-122"/>
-                <a:cs typeface="Calibri" pitchFamily="34" charset="-120"/>
-              </a:rPr>
-              <a:t>git push</a:t>
-            </a:r>
-            <a:endParaRPr lang="en-US" sz="1300" dirty="0"/>
-          </a:p>
-        </p:txBody>
-      </p:sp>
-      <p:sp>
-        <p:nvSpPr>
-          <p:cNvPr id="23" name="Shape 21"/>
-          <p:cNvSpPr/>
-          <p:nvPr/>
-        </p:nvSpPr>
-        <p:spPr>
-          <a:xfrm>
-            <a:off x="777240" y="3063240"/>
-            <a:ext cx="10698480" cy="1965960"/>
-          </a:xfrm>
-          <a:prstGeom prst="roundRect">
-            <a:avLst>
-              <a:gd name="adj" fmla="val 4651"/>
-            </a:avLst>
-          </a:prstGeom>
-          <a:solidFill>
-            <a:srgbClr val="05081A"/>
-          </a:solidFill>
-          <a:ln w="12700">
-            <a:solidFill>
-              <a:srgbClr val="2A3870"/>
-            </a:solidFill>
-            <a:prstDash val="solid"/>
-          </a:ln>
-          <a:effectLst>
-            <a:outerShdw sx="100000" sy="100000" kx="0" ky="0" algn="bl" rotWithShape="0" blurRad="114300" dist="38100" dir="5400000">
-              <a:srgbClr val="000000">
-                <a:alpha val="35000"/>
-              </a:srgbClr>
-            </a:outerShdw>
-          </a:effectLst>
-        </p:spPr>
-      </p:sp>
-      <p:sp>
-        <p:nvSpPr>
-          <p:cNvPr id="24" name="Shape 22"/>
-          <p:cNvSpPr/>
-          <p:nvPr/>
-        </p:nvSpPr>
-        <p:spPr>
-          <a:xfrm>
-            <a:off x="1051560" y="3291840"/>
-            <a:ext cx="146304" cy="146304"/>
-          </a:xfrm>
-          <a:prstGeom prst="ellipse">
-            <a:avLst/>
-          </a:prstGeom>
-          <a:solidFill>
-            <a:srgbClr val="FF5F56"/>
-          </a:solidFill>
-          <a:ln/>
-        </p:spPr>
-      </p:sp>
-      <p:sp>
-        <p:nvSpPr>
-          <p:cNvPr id="25" name="Shape 23"/>
-          <p:cNvSpPr/>
-          <p:nvPr/>
-        </p:nvSpPr>
-        <p:spPr>
-          <a:xfrm>
-            <a:off x="1280160" y="3291840"/>
-            <a:ext cx="146304" cy="146304"/>
-          </a:xfrm>
-          <a:prstGeom prst="ellipse">
-            <a:avLst/>
-          </a:prstGeom>
-          <a:solidFill>
-            <a:srgbClr val="FFBD2E"/>
-          </a:solidFill>
-          <a:ln/>
-        </p:spPr>
-      </p:sp>
-      <p:sp>
-        <p:nvSpPr>
-          <p:cNvPr id="26" name="Shape 24"/>
-          <p:cNvSpPr/>
-          <p:nvPr/>
-        </p:nvSpPr>
-        <p:spPr>
-          <a:xfrm>
-            <a:off x="1508760" y="3291840"/>
-            <a:ext cx="146304" cy="146304"/>
-          </a:xfrm>
-          <a:prstGeom prst="ellipse">
-            <a:avLst/>
-          </a:prstGeom>
-          <a:solidFill>
-            <a:srgbClr val="27C93F"/>
-          </a:solidFill>
-          <a:ln/>
-        </p:spPr>
-      </p:sp>
-      <p:sp>
-        <p:nvSpPr>
-          <p:cNvPr id="27" name="Text 25"/>
-          <p:cNvSpPr/>
-          <p:nvPr/>
-        </p:nvSpPr>
-        <p:spPr>
-          <a:xfrm>
-            <a:off x="1051560" y="3611880"/>
-            <a:ext cx="10241280" cy="1325880"/>
-          </a:xfrm>
-          <a:prstGeom prst="rect">
-            <a:avLst/>
-          </a:prstGeom>
-          <a:noFill/>
-          <a:ln/>
-        </p:spPr>
-        <p:txBody>
-          <a:bodyPr wrap="square" lIns="0" tIns="0" rIns="0" bIns="0" rtlCol="0" anchor="ctr"/>
-          <a:lstStyle/>
-          <a:p>
-            <a:pPr indent="0" marL="0">
-              <a:lnSpc>
-                <a:spcPct val="115000"/>
-              </a:lnSpc>
-              <a:buNone/>
-            </a:pPr>
-            <a:r>
-              <a:rPr lang="en-US" sz="1300" dirty="0">
-                <a:solidFill>
-                  <a:srgbClr val="23F0A0"/>
-                </a:solidFill>
-                <a:latin typeface="Consolas" pitchFamily="34" charset="0"/>
-                <a:ea typeface="Consolas" pitchFamily="34" charset="-122"/>
-                <a:cs typeface="Consolas" pitchFamily="34" charset="-120"/>
-              </a:rPr>
-              <a:t>~/roblox-cursor-starter $ </a:t>
-            </a:r>
-            <a:pPr indent="0" marL="0">
-              <a:lnSpc>
-                <a:spcPct val="115000"/>
-              </a:lnSpc>
-              <a:buNone/>
-            </a:pPr>
-            <a:r>
-              <a:rPr lang="en-US" sz="1300" dirty="0">
-                <a:solidFill>
-                  <a:srgbClr val="EAF0FF"/>
-                </a:solidFill>
-                <a:latin typeface="Consolas" pitchFamily="34" charset="0"/>
-                <a:ea typeface="Consolas" pitchFamily="34" charset="-122"/>
-                <a:cs typeface="Consolas" pitchFamily="34" charset="-120"/>
-              </a:rPr>
-              <a:t>git add .
-</a:t>
-            </a:r>
-            <a:pPr indent="0" marL="0">
-              <a:lnSpc>
-                <a:spcPct val="115000"/>
-              </a:lnSpc>
-              <a:buNone/>
-            </a:pPr>
-            <a:r>
-              <a:rPr lang="en-US" sz="1300" dirty="0">
-                <a:solidFill>
-                  <a:srgbClr val="23F0A0"/>
-                </a:solidFill>
-                <a:latin typeface="Consolas" pitchFamily="34" charset="0"/>
-                <a:ea typeface="Consolas" pitchFamily="34" charset="-122"/>
-                <a:cs typeface="Consolas" pitchFamily="34" charset="-120"/>
-              </a:rPr>
-              <a:t>~/roblox-cursor-starter $ </a:t>
-            </a:r>
-            <a:pPr indent="0" marL="0">
-              <a:lnSpc>
-                <a:spcPct val="115000"/>
-              </a:lnSpc>
-              <a:buNone/>
-            </a:pPr>
-            <a:r>
-              <a:rPr lang="en-US" sz="1300" dirty="0">
-                <a:solidFill>
-                  <a:srgbClr val="EAF0FF"/>
-                </a:solidFill>
-                <a:latin typeface="Consolas" pitchFamily="34" charset="0"/>
-                <a:ea typeface="Consolas" pitchFamily="34" charset="-122"/>
-                <a:cs typeface="Consolas" pitchFamily="34" charset="-120"/>
-              </a:rPr>
-              <a:t>git commit -m "Make coins worth 5"
-</a:t>
-            </a:r>
-            <a:pPr indent="0" marL="0">
-              <a:lnSpc>
-                <a:spcPct val="115000"/>
-              </a:lnSpc>
-              <a:buNone/>
-            </a:pPr>
-            <a:r>
-              <a:rPr lang="en-US" sz="1300" dirty="0">
-                <a:solidFill>
-                  <a:srgbClr val="9BB0D8"/>
-                </a:solidFill>
-                <a:latin typeface="Consolas" pitchFamily="34" charset="0"/>
-                <a:ea typeface="Consolas" pitchFamily="34" charset="-122"/>
-                <a:cs typeface="Consolas" pitchFamily="34" charset="-120"/>
-              </a:rPr>
-              <a:t>  [dev a1b2c3d] Make coins worth 5
-</a:t>
-            </a:r>
-            <a:pPr indent="0" marL="0">
-              <a:lnSpc>
-                <a:spcPct val="115000"/>
-              </a:lnSpc>
-              <a:buNone/>
-            </a:pPr>
-            <a:r>
-              <a:rPr lang="en-US" sz="1300" dirty="0">
-                <a:solidFill>
-                  <a:srgbClr val="23F0A0"/>
-                </a:solidFill>
-                <a:latin typeface="Consolas" pitchFamily="34" charset="0"/>
-                <a:ea typeface="Consolas" pitchFamily="34" charset="-122"/>
-                <a:cs typeface="Consolas" pitchFamily="34" charset="-120"/>
-              </a:rPr>
-              <a:t>~/roblox-cursor-starter $ </a:t>
-            </a:r>
-            <a:pPr indent="0" marL="0">
-              <a:lnSpc>
-                <a:spcPct val="115000"/>
-              </a:lnSpc>
-              <a:buNone/>
-            </a:pPr>
-            <a:r>
-              <a:rPr lang="en-US" sz="1300" dirty="0">
-                <a:solidFill>
-                  <a:srgbClr val="EAF0FF"/>
-                </a:solidFill>
-                <a:latin typeface="Consolas" pitchFamily="34" charset="0"/>
-                <a:ea typeface="Consolas" pitchFamily="34" charset="-122"/>
-                <a:cs typeface="Consolas" pitchFamily="34" charset="-120"/>
-              </a:rPr>
-              <a:t>git push
-</a:t>
-            </a:r>
-            <a:pPr indent="0" marL="0">
-              <a:lnSpc>
-                <a:spcPct val="115000"/>
-              </a:lnSpc>
-              <a:buNone/>
-            </a:pPr>
-            <a:r>
-              <a:rPr lang="en-US" sz="1300" dirty="0">
-                <a:solidFill>
-                  <a:srgbClr val="9BB0D8"/>
-                </a:solidFill>
-                <a:latin typeface="Consolas" pitchFamily="34" charset="0"/>
-                <a:ea typeface="Consolas" pitchFamily="34" charset="-122"/>
-                <a:cs typeface="Consolas" pitchFamily="34" charset="-120"/>
-              </a:rPr>
-              <a:t>  ✓ pushed to GitHub. Tested in Studio.</a:t>
-            </a:r>
-            <a:endParaRPr lang="en-US" sz="1300" dirty="0"/>
-          </a:p>
-        </p:txBody>
-      </p:sp>
-      <p:sp>
-        <p:nvSpPr>
-          <p:cNvPr id="28" name="Shape 26"/>
-          <p:cNvSpPr/>
-          <p:nvPr/>
-        </p:nvSpPr>
-        <p:spPr>
-          <a:xfrm>
-            <a:off x="777240" y="5257800"/>
-            <a:ext cx="10698480" cy="685800"/>
-          </a:xfrm>
-          <a:prstGeom prst="roundRect">
-            <a:avLst>
-              <a:gd name="adj" fmla="val 13333"/>
-            </a:avLst>
-          </a:prstGeom>
-          <a:solidFill>
-            <a:srgbClr val="0E2A1E"/>
-          </a:solidFill>
-          <a:ln w="12700">
-            <a:solidFill>
-              <a:srgbClr val="23F0A0"/>
-            </a:solidFill>
-            <a:prstDash val="solid"/>
-          </a:ln>
-        </p:spPr>
-      </p:sp>
-      <p:sp>
-        <p:nvSpPr>
-          <p:cNvPr id="29" name="Text 27"/>
-          <p:cNvSpPr/>
-          <p:nvPr/>
-        </p:nvSpPr>
-        <p:spPr>
-          <a:xfrm>
-            <a:off x="1005840" y="5257800"/>
-            <a:ext cx="10241280" cy="685800"/>
-          </a:xfrm>
-          <a:prstGeom prst="rect">
-            <a:avLst/>
-          </a:prstGeom>
-          <a:noFill/>
-          <a:ln/>
-        </p:spPr>
-        <p:txBody>
-          <a:bodyPr wrap="square" lIns="0" tIns="0" rIns="0" bIns="0" rtlCol="0" anchor="ctr"/>
-          <a:lstStyle/>
-          <a:p>
-            <a:pPr indent="0" marL="0">
-              <a:buNone/>
-            </a:pPr>
-            <a:r>
-              <a:rPr lang="en-US" sz="1250" b="1" dirty="0">
-                <a:solidFill>
-                  <a:srgbClr val="23F0A0"/>
-                </a:solidFill>
-                <a:latin typeface="Calibri" pitchFamily="34" charset="0"/>
-                <a:ea typeface="Calibri" pitchFamily="34" charset="-122"/>
-                <a:cs typeface="Calibri" pitchFamily="34" charset="-120"/>
-              </a:rPr>
-              <a:t>Keep it safe:  </a:t>
-            </a:r>
-            <a:pPr indent="0" marL="0">
-              <a:buNone/>
-            </a:pPr>
-            <a:r>
-              <a:rPr lang="en-US" sz="1250" dirty="0">
-                <a:solidFill>
-                  <a:srgbClr val="EAF0FF"/>
-                </a:solidFill>
-                <a:latin typeface="Calibri" pitchFamily="34" charset="0"/>
-                <a:ea typeface="Calibri" pitchFamily="34" charset="-122"/>
-                <a:cs typeface="Calibri" pitchFamily="34" charset="-120"/>
-              </a:rPr>
-              <a:t>no API keys, no auto-publish, never use your .ROBLOSECURITY cookie. Publish manually via File → Publish to Roblox.</a:t>
+              <a:t>Studio -&gt; Assistant Settings -&gt; MCP Servers -&gt; Enable Studio as MCP server -&gt; Quick connect -&gt; Cursor.  Verify in Cursor: Settings -&gt; Tools &amp; MCPs -&gt; Roblox_Studio (27 tools).  Safety: tell Cursor “don't modify anything unless I say so.”</a:t>
             </a:r>
             <a:endParaRPr lang="en-US" sz="1250" dirty="0"/>
           </a:p>
@@ -9154,7 +9728,7 @@
     <p:bg>
       <p:bgPr>
         <a:solidFill>
-          <a:srgbClr val="070B22"/>
+          <a:srgbClr val="0A0E27"/>
         </a:solidFill>
       </p:bgPr>
     </p:bg>
@@ -9174,97 +9748,747 @@
       </p:grpSpPr>
       <p:sp>
         <p:nvSpPr>
-          <p:cNvPr id="2" name="Shape 0"/>
-          <p:cNvSpPr/>
-          <p:nvPr/>
-        </p:nvSpPr>
-        <p:spPr>
-          <a:xfrm>
-            <a:off x="8046720" y="3474720"/>
-            <a:ext cx="5486400" cy="5486400"/>
+          <p:cNvPr id="2" name="Text 0"/>
+          <p:cNvSpPr/>
+          <p:nvPr/>
+        </p:nvSpPr>
+        <p:spPr>
+          <a:xfrm>
+            <a:off x="640080" y="502920"/>
+            <a:ext cx="10058400" cy="274320"/>
+          </a:xfrm>
+          <a:prstGeom prst="rect">
+            <a:avLst/>
+          </a:prstGeom>
+          <a:noFill/>
+          <a:ln/>
+        </p:spPr>
+        <p:txBody>
+          <a:bodyPr wrap="square" lIns="0" tIns="0" rIns="0" bIns="0" rtlCol="0" anchor="ctr"/>
+          <a:lstStyle/>
+          <a:p>
+            <a:pPr indent="0" marL="0">
+              <a:buNone/>
+            </a:pPr>
+            <a:r>
+              <a:rPr lang="en-US" sz="1300" b="1" spc="300" kern="0" dirty="0">
+                <a:solidFill>
+                  <a:srgbClr val="FF3DB0"/>
+                </a:solidFill>
+                <a:latin typeface="Calibri" pitchFamily="34" charset="0"/>
+                <a:ea typeface="Calibri" pitchFamily="34" charset="-122"/>
+                <a:cs typeface="Calibri" pitchFamily="34" charset="-120"/>
+              </a:rPr>
+              <a:t>EVERY CODING SESSION</a:t>
+            </a:r>
+            <a:endParaRPr lang="en-US" sz="1300" dirty="0"/>
+          </a:p>
+        </p:txBody>
+      </p:sp>
+      <p:sp>
+        <p:nvSpPr>
+          <p:cNvPr id="3" name="Text 1"/>
+          <p:cNvSpPr/>
+          <p:nvPr/>
+        </p:nvSpPr>
+        <p:spPr>
+          <a:xfrm>
+            <a:off x="640080" y="804672"/>
+            <a:ext cx="10972800" cy="822960"/>
+          </a:xfrm>
+          <a:prstGeom prst="rect">
+            <a:avLst/>
+          </a:prstGeom>
+          <a:noFill/>
+          <a:ln/>
+        </p:spPr>
+        <p:txBody>
+          <a:bodyPr wrap="square" lIns="0" tIns="0" rIns="0" bIns="0" rtlCol="0" anchor="ctr"/>
+          <a:lstStyle/>
+          <a:p>
+            <a:pPr indent="0" marL="0">
+              <a:buNone/>
+            </a:pPr>
+            <a:r>
+              <a:rPr lang="en-US" sz="3800" b="1" dirty="0">
+                <a:solidFill>
+                  <a:srgbClr val="EAF0FF"/>
+                </a:solidFill>
+                <a:latin typeface="Calibri" pitchFamily="34" charset="0"/>
+                <a:ea typeface="Calibri" pitchFamily="34" charset="-122"/>
+                <a:cs typeface="Calibri" pitchFamily="34" charset="-120"/>
+              </a:rPr>
+              <a:t>The daily loop &amp; Git</a:t>
+            </a:r>
+            <a:endParaRPr lang="en-US" sz="3800" dirty="0"/>
+          </a:p>
+        </p:txBody>
+      </p:sp>
+      <p:sp>
+        <p:nvSpPr>
+          <p:cNvPr id="4" name="Shape 2"/>
+          <p:cNvSpPr/>
+          <p:nvPr/>
+        </p:nvSpPr>
+        <p:spPr>
+          <a:xfrm>
+            <a:off x="777240" y="1783080"/>
+            <a:ext cx="1874520" cy="868680"/>
+          </a:xfrm>
+          <a:prstGeom prst="roundRect">
+            <a:avLst>
+              <a:gd name="adj" fmla="val 12632"/>
+            </a:avLst>
+          </a:prstGeom>
+          <a:solidFill>
+            <a:srgbClr val="151E47"/>
+          </a:solidFill>
+          <a:ln w="12700">
+            <a:solidFill>
+              <a:srgbClr val="2A3870"/>
+            </a:solidFill>
+            <a:prstDash val="solid"/>
+          </a:ln>
+          <a:effectLst>
+            <a:outerShdw sx="100000" sy="100000" kx="0" ky="0" algn="bl" rotWithShape="0" blurRad="114300" dist="38100" dir="5400000">
+              <a:srgbClr val="000000">
+                <a:alpha val="35000"/>
+              </a:srgbClr>
+            </a:outerShdw>
+          </a:effectLst>
+        </p:spPr>
+      </p:sp>
+      <p:sp>
+        <p:nvSpPr>
+          <p:cNvPr id="5" name="Shape 3"/>
+          <p:cNvSpPr/>
+          <p:nvPr/>
+        </p:nvSpPr>
+        <p:spPr>
+          <a:xfrm>
+            <a:off x="978408" y="2130552"/>
+            <a:ext cx="182880" cy="182880"/>
           </a:xfrm>
           <a:prstGeom prst="ellipse">
             <a:avLst/>
           </a:prstGeom>
           <a:solidFill>
-            <a:srgbClr val="FF3DB0">
-              <a:alpha val="16000"/>
-            </a:srgbClr>
-          </a:solidFill>
-          <a:ln/>
-        </p:spPr>
-      </p:sp>
-      <p:sp>
-        <p:nvSpPr>
-          <p:cNvPr id="3" name="Shape 1"/>
-          <p:cNvSpPr/>
-          <p:nvPr/>
-        </p:nvSpPr>
-        <p:spPr>
-          <a:xfrm>
-            <a:off x="-1371600" y="-1371600"/>
-            <a:ext cx="4572000" cy="4572000"/>
+            <a:srgbClr val="8A5BFF"/>
+          </a:solidFill>
+          <a:ln/>
+        </p:spPr>
+      </p:sp>
+      <p:sp>
+        <p:nvSpPr>
+          <p:cNvPr id="6" name="Text 4"/>
+          <p:cNvSpPr/>
+          <p:nvPr/>
+        </p:nvSpPr>
+        <p:spPr>
+          <a:xfrm>
+            <a:off x="1188720" y="1783080"/>
+            <a:ext cx="1371600" cy="868680"/>
+          </a:xfrm>
+          <a:prstGeom prst="rect">
+            <a:avLst/>
+          </a:prstGeom>
+          <a:noFill/>
+          <a:ln/>
+        </p:spPr>
+        <p:txBody>
+          <a:bodyPr wrap="square" lIns="0" tIns="0" rIns="0" bIns="0" rtlCol="0" anchor="ctr"/>
+          <a:lstStyle/>
+          <a:p>
+            <a:pPr indent="0" marL="0">
+              <a:buNone/>
+            </a:pPr>
+            <a:r>
+              <a:rPr lang="en-US" sz="1300" b="1" dirty="0">
+                <a:solidFill>
+                  <a:srgbClr val="EAF0FF"/>
+                </a:solidFill>
+                <a:latin typeface="Calibri" pitchFamily="34" charset="0"/>
+                <a:ea typeface="Calibri" pitchFamily="34" charset="-122"/>
+                <a:cs typeface="Calibri" pitchFamily="34" charset="-120"/>
+              </a:rPr>
+              <a:t>Code in Cursor</a:t>
+            </a:r>
+            <a:endParaRPr lang="en-US" sz="1300" dirty="0"/>
+          </a:p>
+        </p:txBody>
+      </p:sp>
+      <p:sp>
+        <p:nvSpPr>
+          <p:cNvPr id="7" name="Shape 5"/>
+          <p:cNvSpPr/>
+          <p:nvPr/>
+        </p:nvSpPr>
+        <p:spPr>
+          <a:xfrm>
+            <a:off x="2670048" y="2221992"/>
+            <a:ext cx="256032" cy="0"/>
+          </a:xfrm>
+          <a:prstGeom prst="line">
+            <a:avLst/>
+          </a:prstGeom>
+          <a:noFill/>
+          <a:ln w="38100">
+            <a:solidFill>
+              <a:srgbClr val="FF3DB0"/>
+            </a:solidFill>
+            <a:prstDash val="solid"/>
+            <a:tailEnd type="triangle"/>
+          </a:ln>
+        </p:spPr>
+      </p:sp>
+      <p:sp>
+        <p:nvSpPr>
+          <p:cNvPr id="8" name="Shape 6"/>
+          <p:cNvSpPr/>
+          <p:nvPr/>
+        </p:nvSpPr>
+        <p:spPr>
+          <a:xfrm>
+            <a:off x="2944368" y="1783080"/>
+            <a:ext cx="1874520" cy="868680"/>
+          </a:xfrm>
+          <a:prstGeom prst="roundRect">
+            <a:avLst>
+              <a:gd name="adj" fmla="val 12632"/>
+            </a:avLst>
+          </a:prstGeom>
+          <a:solidFill>
+            <a:srgbClr val="151E47"/>
+          </a:solidFill>
+          <a:ln w="12700">
+            <a:solidFill>
+              <a:srgbClr val="2A3870"/>
+            </a:solidFill>
+            <a:prstDash val="solid"/>
+          </a:ln>
+          <a:effectLst>
+            <a:outerShdw sx="100000" sy="100000" kx="0" ky="0" algn="bl" rotWithShape="0" blurRad="114300" dist="38100" dir="5400000">
+              <a:srgbClr val="000000">
+                <a:alpha val="35000"/>
+              </a:srgbClr>
+            </a:outerShdw>
+          </a:effectLst>
+        </p:spPr>
+      </p:sp>
+      <p:sp>
+        <p:nvSpPr>
+          <p:cNvPr id="9" name="Shape 7"/>
+          <p:cNvSpPr/>
+          <p:nvPr/>
+        </p:nvSpPr>
+        <p:spPr>
+          <a:xfrm>
+            <a:off x="3145536" y="2130552"/>
+            <a:ext cx="182880" cy="182880"/>
           </a:xfrm>
           <a:prstGeom prst="ellipse">
             <a:avLst/>
           </a:prstGeom>
           <a:solidFill>
-            <a:srgbClr val="00E5FF">
-              <a:alpha val="15000"/>
-            </a:srgbClr>
-          </a:solidFill>
-          <a:ln/>
-        </p:spPr>
-      </p:sp>
-      <p:sp>
-        <p:nvSpPr>
-          <p:cNvPr id="4" name="Text 2"/>
-          <p:cNvSpPr/>
-          <p:nvPr/>
-        </p:nvSpPr>
-        <p:spPr>
-          <a:xfrm>
-            <a:off x="731520" y="2194560"/>
-            <a:ext cx="11155680" cy="1005840"/>
-          </a:xfrm>
-          <a:prstGeom prst="rect">
-            <a:avLst/>
-          </a:prstGeom>
-          <a:noFill/>
-          <a:ln/>
-        </p:spPr>
-        <p:txBody>
-          <a:bodyPr wrap="square" lIns="0" tIns="0" rIns="0" bIns="0" rtlCol="0" anchor="ctr"/>
-          <a:lstStyle/>
-          <a:p>
-            <a:pPr indent="0" marL="0">
-              <a:buNone/>
-            </a:pPr>
-            <a:r>
-              <a:rPr lang="en-US" sz="4200" b="1" dirty="0">
-                <a:solidFill>
-                  <a:srgbClr val="00E5FF"/>
-                </a:solidFill>
-                <a:latin typeface="Calibri" pitchFamily="34" charset="0"/>
-                <a:ea typeface="Calibri" pitchFamily="34" charset="-122"/>
-                <a:cs typeface="Calibri" pitchFamily="34" charset="-120"/>
-              </a:rPr>
-              <a:t>Match. Serve. Connect. Sync. Ship.</a:t>
-            </a:r>
-            <a:endParaRPr lang="en-US" sz="4200" dirty="0"/>
-          </a:p>
-        </p:txBody>
-      </p:sp>
-      <p:sp>
-        <p:nvSpPr>
-          <p:cNvPr id="5" name="Text 3"/>
-          <p:cNvSpPr/>
-          <p:nvPr/>
-        </p:nvSpPr>
-        <p:spPr>
-          <a:xfrm>
-            <a:off x="749808" y="3337560"/>
-            <a:ext cx="10424160" cy="914400"/>
+            <a:srgbClr val="00E5FF"/>
+          </a:solidFill>
+          <a:ln/>
+        </p:spPr>
+      </p:sp>
+      <p:sp>
+        <p:nvSpPr>
+          <p:cNvPr id="10" name="Text 8"/>
+          <p:cNvSpPr/>
+          <p:nvPr/>
+        </p:nvSpPr>
+        <p:spPr>
+          <a:xfrm>
+            <a:off x="3355848" y="1783080"/>
+            <a:ext cx="1371600" cy="868680"/>
+          </a:xfrm>
+          <a:prstGeom prst="rect">
+            <a:avLst/>
+          </a:prstGeom>
+          <a:noFill/>
+          <a:ln/>
+        </p:spPr>
+        <p:txBody>
+          <a:bodyPr wrap="square" lIns="0" tIns="0" rIns="0" bIns="0" rtlCol="0" anchor="ctr"/>
+          <a:lstStyle/>
+          <a:p>
+            <a:pPr indent="0" marL="0">
+              <a:buNone/>
+            </a:pPr>
+            <a:r>
+              <a:rPr lang="en-US" sz="1300" b="1" dirty="0">
+                <a:solidFill>
+                  <a:srgbClr val="EAF0FF"/>
+                </a:solidFill>
+                <a:latin typeface="Calibri" pitchFamily="34" charset="0"/>
+                <a:ea typeface="Calibri" pitchFamily="34" charset="-122"/>
+                <a:cs typeface="Calibri" pitchFamily="34" charset="-120"/>
+              </a:rPr>
+              <a:t>Save</a:t>
+            </a:r>
+            <a:endParaRPr lang="en-US" sz="1300" dirty="0"/>
+          </a:p>
+        </p:txBody>
+      </p:sp>
+      <p:sp>
+        <p:nvSpPr>
+          <p:cNvPr id="11" name="Shape 9"/>
+          <p:cNvSpPr/>
+          <p:nvPr/>
+        </p:nvSpPr>
+        <p:spPr>
+          <a:xfrm>
+            <a:off x="4837176" y="2221992"/>
+            <a:ext cx="256032" cy="0"/>
+          </a:xfrm>
+          <a:prstGeom prst="line">
+            <a:avLst/>
+          </a:prstGeom>
+          <a:noFill/>
+          <a:ln w="38100">
+            <a:solidFill>
+              <a:srgbClr val="FF3DB0"/>
+            </a:solidFill>
+            <a:prstDash val="solid"/>
+            <a:tailEnd type="triangle"/>
+          </a:ln>
+        </p:spPr>
+      </p:sp>
+      <p:sp>
+        <p:nvSpPr>
+          <p:cNvPr id="12" name="Shape 10"/>
+          <p:cNvSpPr/>
+          <p:nvPr/>
+        </p:nvSpPr>
+        <p:spPr>
+          <a:xfrm>
+            <a:off x="5111496" y="1783080"/>
+            <a:ext cx="1874520" cy="868680"/>
+          </a:xfrm>
+          <a:prstGeom prst="roundRect">
+            <a:avLst>
+              <a:gd name="adj" fmla="val 12632"/>
+            </a:avLst>
+          </a:prstGeom>
+          <a:solidFill>
+            <a:srgbClr val="151E47"/>
+          </a:solidFill>
+          <a:ln w="12700">
+            <a:solidFill>
+              <a:srgbClr val="2A3870"/>
+            </a:solidFill>
+            <a:prstDash val="solid"/>
+          </a:ln>
+          <a:effectLst>
+            <a:outerShdw sx="100000" sy="100000" kx="0" ky="0" algn="bl" rotWithShape="0" blurRad="114300" dist="38100" dir="5400000">
+              <a:srgbClr val="000000">
+                <a:alpha val="35000"/>
+              </a:srgbClr>
+            </a:outerShdw>
+          </a:effectLst>
+        </p:spPr>
+      </p:sp>
+      <p:sp>
+        <p:nvSpPr>
+          <p:cNvPr id="13" name="Shape 11"/>
+          <p:cNvSpPr/>
+          <p:nvPr/>
+        </p:nvSpPr>
+        <p:spPr>
+          <a:xfrm>
+            <a:off x="5312664" y="2130552"/>
+            <a:ext cx="182880" cy="182880"/>
+          </a:xfrm>
+          <a:prstGeom prst="ellipse">
+            <a:avLst/>
+          </a:prstGeom>
+          <a:solidFill>
+            <a:srgbClr val="FF3DB0"/>
+          </a:solidFill>
+          <a:ln/>
+        </p:spPr>
+      </p:sp>
+      <p:sp>
+        <p:nvSpPr>
+          <p:cNvPr id="14" name="Text 12"/>
+          <p:cNvSpPr/>
+          <p:nvPr/>
+        </p:nvSpPr>
+        <p:spPr>
+          <a:xfrm>
+            <a:off x="5522976" y="1783080"/>
+            <a:ext cx="1371600" cy="868680"/>
+          </a:xfrm>
+          <a:prstGeom prst="rect">
+            <a:avLst/>
+          </a:prstGeom>
+          <a:noFill/>
+          <a:ln/>
+        </p:spPr>
+        <p:txBody>
+          <a:bodyPr wrap="square" lIns="0" tIns="0" rIns="0" bIns="0" rtlCol="0" anchor="ctr"/>
+          <a:lstStyle/>
+          <a:p>
+            <a:pPr indent="0" marL="0">
+              <a:buNone/>
+            </a:pPr>
+            <a:r>
+              <a:rPr lang="en-US" sz="1300" b="1" dirty="0">
+                <a:solidFill>
+                  <a:srgbClr val="EAF0FF"/>
+                </a:solidFill>
+                <a:latin typeface="Calibri" pitchFamily="34" charset="0"/>
+                <a:ea typeface="Calibri" pitchFamily="34" charset="-122"/>
+                <a:cs typeface="Calibri" pitchFamily="34" charset="-120"/>
+              </a:rPr>
+              <a:t>Test in Studio</a:t>
+            </a:r>
+            <a:endParaRPr lang="en-US" sz="1300" dirty="0"/>
+          </a:p>
+        </p:txBody>
+      </p:sp>
+      <p:sp>
+        <p:nvSpPr>
+          <p:cNvPr id="15" name="Shape 13"/>
+          <p:cNvSpPr/>
+          <p:nvPr/>
+        </p:nvSpPr>
+        <p:spPr>
+          <a:xfrm>
+            <a:off x="7004304" y="2221992"/>
+            <a:ext cx="256032" cy="0"/>
+          </a:xfrm>
+          <a:prstGeom prst="line">
+            <a:avLst/>
+          </a:prstGeom>
+          <a:noFill/>
+          <a:ln w="38100">
+            <a:solidFill>
+              <a:srgbClr val="FF3DB0"/>
+            </a:solidFill>
+            <a:prstDash val="solid"/>
+            <a:tailEnd type="triangle"/>
+          </a:ln>
+        </p:spPr>
+      </p:sp>
+      <p:sp>
+        <p:nvSpPr>
+          <p:cNvPr id="16" name="Shape 14"/>
+          <p:cNvSpPr/>
+          <p:nvPr/>
+        </p:nvSpPr>
+        <p:spPr>
+          <a:xfrm>
+            <a:off x="7278624" y="1783080"/>
+            <a:ext cx="1874520" cy="868680"/>
+          </a:xfrm>
+          <a:prstGeom prst="roundRect">
+            <a:avLst>
+              <a:gd name="adj" fmla="val 12632"/>
+            </a:avLst>
+          </a:prstGeom>
+          <a:solidFill>
+            <a:srgbClr val="151E47"/>
+          </a:solidFill>
+          <a:ln w="12700">
+            <a:solidFill>
+              <a:srgbClr val="2A3870"/>
+            </a:solidFill>
+            <a:prstDash val="solid"/>
+          </a:ln>
+          <a:effectLst>
+            <a:outerShdw sx="100000" sy="100000" kx="0" ky="0" algn="bl" rotWithShape="0" blurRad="114300" dist="38100" dir="5400000">
+              <a:srgbClr val="000000">
+                <a:alpha val="35000"/>
+              </a:srgbClr>
+            </a:outerShdw>
+          </a:effectLst>
+        </p:spPr>
+      </p:sp>
+      <p:sp>
+        <p:nvSpPr>
+          <p:cNvPr id="17" name="Shape 15"/>
+          <p:cNvSpPr/>
+          <p:nvPr/>
+        </p:nvSpPr>
+        <p:spPr>
+          <a:xfrm>
+            <a:off x="7479792" y="2130552"/>
+            <a:ext cx="182880" cy="182880"/>
+          </a:xfrm>
+          <a:prstGeom prst="ellipse">
+            <a:avLst/>
+          </a:prstGeom>
+          <a:solidFill>
+            <a:srgbClr val="FFD23F"/>
+          </a:solidFill>
+          <a:ln/>
+        </p:spPr>
+      </p:sp>
+      <p:sp>
+        <p:nvSpPr>
+          <p:cNvPr id="18" name="Text 16"/>
+          <p:cNvSpPr/>
+          <p:nvPr/>
+        </p:nvSpPr>
+        <p:spPr>
+          <a:xfrm>
+            <a:off x="7690104" y="1783080"/>
+            <a:ext cx="1371600" cy="868680"/>
+          </a:xfrm>
+          <a:prstGeom prst="rect">
+            <a:avLst/>
+          </a:prstGeom>
+          <a:noFill/>
+          <a:ln/>
+        </p:spPr>
+        <p:txBody>
+          <a:bodyPr wrap="square" lIns="0" tIns="0" rIns="0" bIns="0" rtlCol="0" anchor="ctr"/>
+          <a:lstStyle/>
+          <a:p>
+            <a:pPr indent="0" marL="0">
+              <a:buNone/>
+            </a:pPr>
+            <a:r>
+              <a:rPr lang="en-US" sz="1300" b="1" dirty="0">
+                <a:solidFill>
+                  <a:srgbClr val="EAF0FF"/>
+                </a:solidFill>
+                <a:latin typeface="Calibri" pitchFamily="34" charset="0"/>
+                <a:ea typeface="Calibri" pitchFamily="34" charset="-122"/>
+                <a:cs typeface="Calibri" pitchFamily="34" charset="-120"/>
+              </a:rPr>
+              <a:t>git commit</a:t>
+            </a:r>
+            <a:endParaRPr lang="en-US" sz="1300" dirty="0"/>
+          </a:p>
+        </p:txBody>
+      </p:sp>
+      <p:sp>
+        <p:nvSpPr>
+          <p:cNvPr id="19" name="Shape 17"/>
+          <p:cNvSpPr/>
+          <p:nvPr/>
+        </p:nvSpPr>
+        <p:spPr>
+          <a:xfrm>
+            <a:off x="9171432" y="2221992"/>
+            <a:ext cx="256032" cy="0"/>
+          </a:xfrm>
+          <a:prstGeom prst="line">
+            <a:avLst/>
+          </a:prstGeom>
+          <a:noFill/>
+          <a:ln w="38100">
+            <a:solidFill>
+              <a:srgbClr val="FF3DB0"/>
+            </a:solidFill>
+            <a:prstDash val="solid"/>
+            <a:tailEnd type="triangle"/>
+          </a:ln>
+        </p:spPr>
+      </p:sp>
+      <p:sp>
+        <p:nvSpPr>
+          <p:cNvPr id="20" name="Shape 18"/>
+          <p:cNvSpPr/>
+          <p:nvPr/>
+        </p:nvSpPr>
+        <p:spPr>
+          <a:xfrm>
+            <a:off x="9445752" y="1783080"/>
+            <a:ext cx="1874520" cy="868680"/>
+          </a:xfrm>
+          <a:prstGeom prst="roundRect">
+            <a:avLst>
+              <a:gd name="adj" fmla="val 12632"/>
+            </a:avLst>
+          </a:prstGeom>
+          <a:solidFill>
+            <a:srgbClr val="151E47"/>
+          </a:solidFill>
+          <a:ln w="12700">
+            <a:solidFill>
+              <a:srgbClr val="2A3870"/>
+            </a:solidFill>
+            <a:prstDash val="solid"/>
+          </a:ln>
+          <a:effectLst>
+            <a:outerShdw sx="100000" sy="100000" kx="0" ky="0" algn="bl" rotWithShape="0" blurRad="114300" dist="38100" dir="5400000">
+              <a:srgbClr val="000000">
+                <a:alpha val="35000"/>
+              </a:srgbClr>
+            </a:outerShdw>
+          </a:effectLst>
+        </p:spPr>
+      </p:sp>
+      <p:sp>
+        <p:nvSpPr>
+          <p:cNvPr id="21" name="Shape 19"/>
+          <p:cNvSpPr/>
+          <p:nvPr/>
+        </p:nvSpPr>
+        <p:spPr>
+          <a:xfrm>
+            <a:off x="9646920" y="2130552"/>
+            <a:ext cx="182880" cy="182880"/>
+          </a:xfrm>
+          <a:prstGeom prst="ellipse">
+            <a:avLst/>
+          </a:prstGeom>
+          <a:solidFill>
+            <a:srgbClr val="23F0A0"/>
+          </a:solidFill>
+          <a:ln/>
+        </p:spPr>
+      </p:sp>
+      <p:sp>
+        <p:nvSpPr>
+          <p:cNvPr id="22" name="Text 20"/>
+          <p:cNvSpPr/>
+          <p:nvPr/>
+        </p:nvSpPr>
+        <p:spPr>
+          <a:xfrm>
+            <a:off x="9857232" y="1783080"/>
+            <a:ext cx="1371600" cy="868680"/>
+          </a:xfrm>
+          <a:prstGeom prst="rect">
+            <a:avLst/>
+          </a:prstGeom>
+          <a:noFill/>
+          <a:ln/>
+        </p:spPr>
+        <p:txBody>
+          <a:bodyPr wrap="square" lIns="0" tIns="0" rIns="0" bIns="0" rtlCol="0" anchor="ctr"/>
+          <a:lstStyle/>
+          <a:p>
+            <a:pPr indent="0" marL="0">
+              <a:buNone/>
+            </a:pPr>
+            <a:r>
+              <a:rPr lang="en-US" sz="1300" b="1" dirty="0">
+                <a:solidFill>
+                  <a:srgbClr val="EAF0FF"/>
+                </a:solidFill>
+                <a:latin typeface="Calibri" pitchFamily="34" charset="0"/>
+                <a:ea typeface="Calibri" pitchFamily="34" charset="-122"/>
+                <a:cs typeface="Calibri" pitchFamily="34" charset="-120"/>
+              </a:rPr>
+              <a:t>git push</a:t>
+            </a:r>
+            <a:endParaRPr lang="en-US" sz="1300" dirty="0"/>
+          </a:p>
+        </p:txBody>
+      </p:sp>
+      <p:sp>
+        <p:nvSpPr>
+          <p:cNvPr id="23" name="Shape 21"/>
+          <p:cNvSpPr/>
+          <p:nvPr/>
+        </p:nvSpPr>
+        <p:spPr>
+          <a:xfrm>
+            <a:off x="777240" y="3063240"/>
+            <a:ext cx="10698480" cy="1965960"/>
+          </a:xfrm>
+          <a:prstGeom prst="roundRect">
+            <a:avLst>
+              <a:gd name="adj" fmla="val 4651"/>
+            </a:avLst>
+          </a:prstGeom>
+          <a:solidFill>
+            <a:srgbClr val="05081A"/>
+          </a:solidFill>
+          <a:ln w="12700">
+            <a:solidFill>
+              <a:srgbClr val="2A3870"/>
+            </a:solidFill>
+            <a:prstDash val="solid"/>
+          </a:ln>
+          <a:effectLst>
+            <a:outerShdw sx="100000" sy="100000" kx="0" ky="0" algn="bl" rotWithShape="0" blurRad="114300" dist="38100" dir="5400000">
+              <a:srgbClr val="000000">
+                <a:alpha val="35000"/>
+              </a:srgbClr>
+            </a:outerShdw>
+          </a:effectLst>
+        </p:spPr>
+      </p:sp>
+      <p:sp>
+        <p:nvSpPr>
+          <p:cNvPr id="24" name="Shape 22"/>
+          <p:cNvSpPr/>
+          <p:nvPr/>
+        </p:nvSpPr>
+        <p:spPr>
+          <a:xfrm>
+            <a:off x="1051560" y="3291840"/>
+            <a:ext cx="146304" cy="146304"/>
+          </a:xfrm>
+          <a:prstGeom prst="ellipse">
+            <a:avLst/>
+          </a:prstGeom>
+          <a:solidFill>
+            <a:srgbClr val="FF5F56"/>
+          </a:solidFill>
+          <a:ln/>
+        </p:spPr>
+      </p:sp>
+      <p:sp>
+        <p:nvSpPr>
+          <p:cNvPr id="25" name="Shape 23"/>
+          <p:cNvSpPr/>
+          <p:nvPr/>
+        </p:nvSpPr>
+        <p:spPr>
+          <a:xfrm>
+            <a:off x="1280160" y="3291840"/>
+            <a:ext cx="146304" cy="146304"/>
+          </a:xfrm>
+          <a:prstGeom prst="ellipse">
+            <a:avLst/>
+          </a:prstGeom>
+          <a:solidFill>
+            <a:srgbClr val="FFBD2E"/>
+          </a:solidFill>
+          <a:ln/>
+        </p:spPr>
+      </p:sp>
+      <p:sp>
+        <p:nvSpPr>
+          <p:cNvPr id="26" name="Shape 24"/>
+          <p:cNvSpPr/>
+          <p:nvPr/>
+        </p:nvSpPr>
+        <p:spPr>
+          <a:xfrm>
+            <a:off x="1508760" y="3291840"/>
+            <a:ext cx="146304" cy="146304"/>
+          </a:xfrm>
+          <a:prstGeom prst="ellipse">
+            <a:avLst/>
+          </a:prstGeom>
+          <a:solidFill>
+            <a:srgbClr val="27C93F"/>
+          </a:solidFill>
+          <a:ln/>
+        </p:spPr>
+      </p:sp>
+      <p:sp>
+        <p:nvSpPr>
+          <p:cNvPr id="27" name="Text 25"/>
+          <p:cNvSpPr/>
+          <p:nvPr/>
+        </p:nvSpPr>
+        <p:spPr>
+          <a:xfrm>
+            <a:off x="1051560" y="3611880"/>
+            <a:ext cx="10241280" cy="1325880"/>
           </a:xfrm>
           <a:prstGeom prst="rect">
             <a:avLst/>
@@ -9278,103 +10502,225 @@
           <a:p>
             <a:pPr indent="0" marL="0">
               <a:lnSpc>
-                <a:spcPct val="110000"/>
+                <a:spcPct val="115000"/>
               </a:lnSpc>
               <a:buNone/>
             </a:pPr>
             <a:r>
-              <a:rPr lang="en-US" sz="1700" dirty="0">
+              <a:rPr lang="en-US" sz="1300" dirty="0">
+                <a:solidFill>
+                  <a:srgbClr val="23F0A0"/>
+                </a:solidFill>
+                <a:latin typeface="Consolas" pitchFamily="34" charset="0"/>
+                <a:ea typeface="Consolas" pitchFamily="34" charset="-122"/>
+                <a:cs typeface="Consolas" pitchFamily="34" charset="-120"/>
+              </a:rPr>
+              <a:t>~/roblox-cursor-starter $ </a:t>
+            </a:r>
+            <a:pPr indent="0" marL="0">
+              <a:lnSpc>
+                <a:spcPct val="115000"/>
+              </a:lnSpc>
+              <a:buNone/>
+            </a:pPr>
+            <a:r>
+              <a:rPr lang="en-US" sz="1300" dirty="0">
                 <a:solidFill>
                   <a:srgbClr val="EAF0FF"/>
                 </a:solidFill>
-                <a:latin typeface="Calibri" pitchFamily="34" charset="0"/>
-                <a:ea typeface="Calibri" pitchFamily="34" charset="-122"/>
-                <a:cs typeface="Calibri" pitchFamily="34" charset="-120"/>
-              </a:rPr>
-              <a:t>Same version on both sides, run rojo serve, connect the plugin, confirm files land in Explorer, commit with Git. That's the whole rig.</a:t>
-            </a:r>
-            <a:endParaRPr lang="en-US" sz="1700" dirty="0"/>
-          </a:p>
-        </p:txBody>
-      </p:sp>
-      <p:sp>
-        <p:nvSpPr>
-          <p:cNvPr id="6" name="Text 4"/>
-          <p:cNvSpPr/>
-          <p:nvPr/>
-        </p:nvSpPr>
-        <p:spPr>
-          <a:xfrm>
-            <a:off x="749808" y="4526280"/>
-            <a:ext cx="10424160" cy="640080"/>
-          </a:xfrm>
-          <a:prstGeom prst="rect">
-            <a:avLst/>
-          </a:prstGeom>
-          <a:noFill/>
-          <a:ln/>
-        </p:spPr>
-        <p:txBody>
-          <a:bodyPr wrap="square" lIns="0" tIns="0" rIns="0" bIns="0" rtlCol="0" anchor="ctr"/>
-          <a:lstStyle/>
-          <a:p>
+                <a:latin typeface="Consolas" pitchFamily="34" charset="0"/>
+                <a:ea typeface="Consolas" pitchFamily="34" charset="-122"/>
+                <a:cs typeface="Consolas" pitchFamily="34" charset="-120"/>
+              </a:rPr>
+              <a:t>git add .
+</a:t>
+            </a:r>
             <a:pPr indent="0" marL="0">
               <a:lnSpc>
-                <a:spcPct val="110000"/>
+                <a:spcPct val="115000"/>
               </a:lnSpc>
               <a:buNone/>
             </a:pPr>
             <a:r>
-              <a:rPr lang="en-US" sz="1500" dirty="0">
+              <a:rPr lang="en-US" sz="1300" dirty="0">
+                <a:solidFill>
+                  <a:srgbClr val="23F0A0"/>
+                </a:solidFill>
+                <a:latin typeface="Consolas" pitchFamily="34" charset="0"/>
+                <a:ea typeface="Consolas" pitchFamily="34" charset="-122"/>
+                <a:cs typeface="Consolas" pitchFamily="34" charset="-120"/>
+              </a:rPr>
+              <a:t>~/roblox-cursor-starter $ </a:t>
+            </a:r>
+            <a:pPr indent="0" marL="0">
+              <a:lnSpc>
+                <a:spcPct val="115000"/>
+              </a:lnSpc>
+              <a:buNone/>
+            </a:pPr>
+            <a:r>
+              <a:rPr lang="en-US" sz="1300" dirty="0">
+                <a:solidFill>
+                  <a:srgbClr val="EAF0FF"/>
+                </a:solidFill>
+                <a:latin typeface="Consolas" pitchFamily="34" charset="0"/>
+                <a:ea typeface="Consolas" pitchFamily="34" charset="-122"/>
+                <a:cs typeface="Consolas" pitchFamily="34" charset="-120"/>
+              </a:rPr>
+              <a:t>git commit -m "Make coins worth 5"
+</a:t>
+            </a:r>
+            <a:pPr indent="0" marL="0">
+              <a:lnSpc>
+                <a:spcPct val="115000"/>
+              </a:lnSpc>
+              <a:buNone/>
+            </a:pPr>
+            <a:r>
+              <a:rPr lang="en-US" sz="1300" dirty="0">
                 <a:solidFill>
                   <a:srgbClr val="9BB0D8"/>
                 </a:solidFill>
-                <a:latin typeface="Calibri" pitchFamily="34" charset="0"/>
-                <a:ea typeface="Calibri" pitchFamily="34" charset="-122"/>
-                <a:cs typeface="Calibri" pitchFamily="34" charset="-120"/>
-              </a:rPr>
-              <a:t>Then tell Cursor's AI what game you want — obby, tycoon, simulator — and build it on the baseplate, one saved file at a time.</a:t>
-            </a:r>
-            <a:endParaRPr lang="en-US" sz="1500" dirty="0"/>
-          </a:p>
-        </p:txBody>
-      </p:sp>
-      <p:sp>
-        <p:nvSpPr>
-          <p:cNvPr id="7" name="Text 5"/>
-          <p:cNvSpPr/>
-          <p:nvPr/>
-        </p:nvSpPr>
-        <p:spPr>
-          <a:xfrm>
-            <a:off x="749808" y="5349240"/>
-            <a:ext cx="10972800" cy="457200"/>
-          </a:xfrm>
-          <a:prstGeom prst="rect">
-            <a:avLst/>
-          </a:prstGeom>
-          <a:noFill/>
-          <a:ln/>
-        </p:spPr>
-        <p:txBody>
-          <a:bodyPr wrap="square" lIns="0" tIns="0" rIns="0" bIns="0" rtlCol="0" anchor="ctr"/>
-          <a:lstStyle/>
-          <a:p>
-            <a:pPr indent="0" marL="0">
-              <a:buNone/>
-            </a:pPr>
-            <a:r>
-              <a:rPr lang="en-US" sz="1300" i="1" dirty="0">
+                <a:latin typeface="Consolas" pitchFamily="34" charset="0"/>
+                <a:ea typeface="Consolas" pitchFamily="34" charset="-122"/>
+                <a:cs typeface="Consolas" pitchFamily="34" charset="-120"/>
+              </a:rPr>
+              <a:t>  [dev a1b2c3d] Make coins worth 5
+</a:t>
+            </a:r>
+            <a:pPr indent="0" marL="0">
+              <a:lnSpc>
+                <a:spcPct val="115000"/>
+              </a:lnSpc>
+              <a:buNone/>
+            </a:pPr>
+            <a:r>
+              <a:rPr lang="en-US" sz="1300" dirty="0">
+                <a:solidFill>
+                  <a:srgbClr val="23F0A0"/>
+                </a:solidFill>
+                <a:latin typeface="Consolas" pitchFamily="34" charset="0"/>
+                <a:ea typeface="Consolas" pitchFamily="34" charset="-122"/>
+                <a:cs typeface="Consolas" pitchFamily="34" charset="-120"/>
+              </a:rPr>
+              <a:t>~/roblox-cursor-starter $ </a:t>
+            </a:r>
+            <a:pPr indent="0" marL="0">
+              <a:lnSpc>
+                <a:spcPct val="115000"/>
+              </a:lnSpc>
+              <a:buNone/>
+            </a:pPr>
+            <a:r>
+              <a:rPr lang="en-US" sz="1300" dirty="0">
+                <a:solidFill>
+                  <a:srgbClr val="EAF0FF"/>
+                </a:solidFill>
+                <a:latin typeface="Consolas" pitchFamily="34" charset="0"/>
+                <a:ea typeface="Consolas" pitchFamily="34" charset="-122"/>
+                <a:cs typeface="Consolas" pitchFamily="34" charset="-120"/>
+              </a:rPr>
+              <a:t>git push
+</a:t>
+            </a:r>
+            <a:pPr indent="0" marL="0">
+              <a:lnSpc>
+                <a:spcPct val="115000"/>
+              </a:lnSpc>
+              <a:buNone/>
+            </a:pPr>
+            <a:r>
+              <a:rPr lang="en-US" sz="1300" dirty="0">
                 <a:solidFill>
                   <a:srgbClr val="9BB0D8"/>
                 </a:solidFill>
-                <a:latin typeface="Calibri" pitchFamily="34" charset="0"/>
-                <a:ea typeface="Calibri" pitchFamily="34" charset="-122"/>
-                <a:cs typeface="Calibri" pitchFamily="34" charset="-120"/>
-              </a:rPr>
-              <a:t>Full illustrated guide: README.md + docs/index.html in the starter repo.</a:t>
+                <a:latin typeface="Consolas" pitchFamily="34" charset="0"/>
+                <a:ea typeface="Consolas" pitchFamily="34" charset="-122"/>
+                <a:cs typeface="Consolas" pitchFamily="34" charset="-120"/>
+              </a:rPr>
+              <a:t>  pushed to GitHub. Tested in Studio.</a:t>
             </a:r>
             <a:endParaRPr lang="en-US" sz="1300" dirty="0"/>
+          </a:p>
+        </p:txBody>
+      </p:sp>
+      <p:sp>
+        <p:nvSpPr>
+          <p:cNvPr id="28" name="Shape 26"/>
+          <p:cNvSpPr/>
+          <p:nvPr/>
+        </p:nvSpPr>
+        <p:spPr>
+          <a:xfrm>
+            <a:off x="777240" y="5257800"/>
+            <a:ext cx="10698480" cy="685800"/>
+          </a:xfrm>
+          <a:prstGeom prst="roundRect">
+            <a:avLst>
+              <a:gd name="adj" fmla="val 13333"/>
+            </a:avLst>
+          </a:prstGeom>
+          <a:solidFill>
+            <a:srgbClr val="0E2A1E"/>
+          </a:solidFill>
+          <a:ln w="12700">
+            <a:solidFill>
+              <a:srgbClr val="23F0A0"/>
+            </a:solidFill>
+            <a:prstDash val="solid"/>
+          </a:ln>
+        </p:spPr>
+      </p:sp>
+      <p:sp>
+        <p:nvSpPr>
+          <p:cNvPr id="29" name="Text 27"/>
+          <p:cNvSpPr/>
+          <p:nvPr/>
+        </p:nvSpPr>
+        <p:spPr>
+          <a:xfrm>
+            <a:off x="1005840" y="5257800"/>
+            <a:ext cx="10241280" cy="685800"/>
+          </a:xfrm>
+          <a:prstGeom prst="rect">
+            <a:avLst/>
+          </a:prstGeom>
+          <a:noFill/>
+          <a:ln/>
+        </p:spPr>
+        <p:txBody>
+          <a:bodyPr wrap="square" lIns="0" tIns="0" rIns="0" bIns="0" rtlCol="0" anchor="ctr"/>
+          <a:lstStyle/>
+          <a:p>
+            <a:pPr indent="0" marL="0">
+              <a:buNone/>
+            </a:pPr>
+            <a:r>
+              <a:rPr lang="en-US" sz="1250" b="1" dirty="0">
+                <a:solidFill>
+                  <a:srgbClr val="23F0A0"/>
+                </a:solidFill>
+                <a:latin typeface="Calibri" pitchFamily="34" charset="0"/>
+                <a:ea typeface="Calibri" pitchFamily="34" charset="-122"/>
+                <a:cs typeface="Calibri" pitchFamily="34" charset="-120"/>
+              </a:rPr>
+              <a:t>Keep it safe:  </a:t>
+            </a:r>
+            <a:pPr indent="0" marL="0">
+              <a:buNone/>
+            </a:pPr>
+            <a:r>
+              <a:rPr lang="en-US" sz="1250" dirty="0">
+                <a:solidFill>
+                  <a:srgbClr val="EAF0FF"/>
+                </a:solidFill>
+                <a:latin typeface="Calibri" pitchFamily="34" charset="0"/>
+                <a:ea typeface="Calibri" pitchFamily="34" charset="-122"/>
+                <a:cs typeface="Calibri" pitchFamily="34" charset="-120"/>
+              </a:rPr>
+              <a:t>no API keys, no auto-publish, never use your .ROBLOSECURITY cookie. Publish manually via File -&gt; Publish to Roblox.</a:t>
+            </a:r>
+            <a:endParaRPr lang="en-US" sz="1250" dirty="0"/>
           </a:p>
         </p:txBody>
       </p:sp>
